--- a/Mapped Curriculum Lessons/Grade 6/Lesson 05 - More Decisions/More Decisions - Slides.pptx
+++ b/Mapped Curriculum Lessons/Grade 6/Lesson 05 - More Decisions/More Decisions - Slides.pptx
@@ -2,28 +2,28 @@
 <file path=ppt/presentation.xml><?xml version="1.0" encoding="utf-8"?>
 <p:presentation xmlns:p="http://schemas.openxmlformats.org/presentationml/2006/main" embedTrueTypeFonts="1" saveSubsetFonts="0">
   <p:sldMasterIdLst>
-    <p:sldMasterId xmlns:r="http://schemas.openxmlformats.org/officeDocument/2006/relationships" id="2147483648" r:id="Rdb743a9eb3d44970"/>
+    <p:sldMasterId xmlns:r="http://schemas.openxmlformats.org/officeDocument/2006/relationships" id="2147483648" r:id="Rd1fe34fb7dad4ee2"/>
   </p:sldMasterIdLst>
   <p:notesMasterIdLst>
-    <p:notesMasterId xmlns:r="http://schemas.openxmlformats.org/officeDocument/2006/relationships" r:id="R693f083259c7434b"/>
+    <p:notesMasterId xmlns:r="http://schemas.openxmlformats.org/officeDocument/2006/relationships" r:id="R559938d53583488b"/>
   </p:notesMasterIdLst>
   <p:sldIdLst>
-    <p:sldId xmlns:r="http://schemas.openxmlformats.org/officeDocument/2006/relationships" id="256" r:id="R1c9d8a410f8d4357"/>
-    <p:sldId xmlns:r="http://schemas.openxmlformats.org/officeDocument/2006/relationships" id="257" r:id="R1ea0ace60e4f4cac"/>
-    <p:sldId xmlns:r="http://schemas.openxmlformats.org/officeDocument/2006/relationships" id="258" r:id="R3922200bcef94642"/>
-    <p:sldId xmlns:r="http://schemas.openxmlformats.org/officeDocument/2006/relationships" id="259" r:id="Rb3fa7de74b6f4716"/>
-    <p:sldId xmlns:r="http://schemas.openxmlformats.org/officeDocument/2006/relationships" id="260" r:id="R6dbab6db998741d7"/>
-    <p:sldId xmlns:r="http://schemas.openxmlformats.org/officeDocument/2006/relationships" id="261" r:id="R12579d80a25b4890"/>
-    <p:sldId xmlns:r="http://schemas.openxmlformats.org/officeDocument/2006/relationships" id="262" r:id="R738f5222ddb64959"/>
-    <p:sldId xmlns:r="http://schemas.openxmlformats.org/officeDocument/2006/relationships" id="263" r:id="Rfca39c828ba44c33"/>
-    <p:sldId xmlns:r="http://schemas.openxmlformats.org/officeDocument/2006/relationships" id="264" r:id="R47e1349a111b4aea"/>
+    <p:sldId xmlns:r="http://schemas.openxmlformats.org/officeDocument/2006/relationships" id="256" r:id="R64ff0756df414255"/>
+    <p:sldId xmlns:r="http://schemas.openxmlformats.org/officeDocument/2006/relationships" id="257" r:id="Rc73ce508989a4d61"/>
+    <p:sldId xmlns:r="http://schemas.openxmlformats.org/officeDocument/2006/relationships" id="258" r:id="Rbc7cc33a696942df"/>
+    <p:sldId xmlns:r="http://schemas.openxmlformats.org/officeDocument/2006/relationships" id="259" r:id="R21cd30c6d4b74bdd"/>
+    <p:sldId xmlns:r="http://schemas.openxmlformats.org/officeDocument/2006/relationships" id="260" r:id="R77a3b4d643fe4063"/>
+    <p:sldId xmlns:r="http://schemas.openxmlformats.org/officeDocument/2006/relationships" id="261" r:id="R136c92cee1164e2a"/>
+    <p:sldId xmlns:r="http://schemas.openxmlformats.org/officeDocument/2006/relationships" id="262" r:id="Rf5381818d5eb4a78"/>
+    <p:sldId xmlns:r="http://schemas.openxmlformats.org/officeDocument/2006/relationships" id="263" r:id="R9219e62e3f1849f9"/>
+    <p:sldId xmlns:r="http://schemas.openxmlformats.org/officeDocument/2006/relationships" id="264" r:id="Rd9e20f72d10c4a26"/>
   </p:sldIdLst>
   <p:sldSz cx="12192000" cy="6858000"/>
   <p:notesSz cx="6858000" cy="9144000"/>
   <p:embeddedFontLst>
     <p:embeddedFont>
       <p:font typeface="JetBrains Mono"/>
-      <p:regular xmlns:r="http://schemas.openxmlformats.org/officeDocument/2006/relationships" r:id="R40be042f77c14c36"/>
+      <p:regular xmlns:r="http://schemas.openxmlformats.org/officeDocument/2006/relationships" r:id="Rd050465fe0084bbf"/>
     </p:embeddedFont>
   </p:embeddedFontLst>
 </p:presentation>
@@ -1071,7 +1071,7 @@
           <p:nvPr/>
         </p:nvPicPr>
         <p:blipFill rotWithShape="1">
-          <a:blip xmlns:r="http://schemas.openxmlformats.org/officeDocument/2006/relationships" xmlns:a="http://schemas.openxmlformats.org/drawingml/2006/main" r:embed="R124ccb8fa4f0498c"/>
+          <a:blip xmlns:r="http://schemas.openxmlformats.org/officeDocument/2006/relationships" xmlns:a="http://schemas.openxmlformats.org/drawingml/2006/main" r:embed="R8aefdb88d5e548e3"/>
           <a:stretch xmlns:a="http://schemas.openxmlformats.org/drawingml/2006/main"/>
         </p:blipFill>
         <p:spPr>
@@ -1451,7 +1451,7 @@
           <p:nvPr/>
         </p:nvPicPr>
         <p:blipFill rotWithShape="1">
-          <a:blip xmlns:r="http://schemas.openxmlformats.org/officeDocument/2006/relationships" xmlns:a="http://schemas.openxmlformats.org/drawingml/2006/main" r:embed="R12b4c8fb31ac462e">
+          <a:blip xmlns:r="http://schemas.openxmlformats.org/officeDocument/2006/relationships" xmlns:a="http://schemas.openxmlformats.org/drawingml/2006/main" r:embed="R01dce6eaa45d49b8">
             <a:alphaModFix amt="28000"/>
           </a:blip>
           <a:stretch xmlns:a="http://schemas.openxmlformats.org/drawingml/2006/main"/>
@@ -1664,7 +1664,7 @@
           <p:nvPr/>
         </p:nvPicPr>
         <p:blipFill rotWithShape="1">
-          <a:blip xmlns:r="http://schemas.openxmlformats.org/officeDocument/2006/relationships" xmlns:a="http://schemas.openxmlformats.org/drawingml/2006/main" r:embed="R827552efa14c4dc7">
+          <a:blip xmlns:r="http://schemas.openxmlformats.org/officeDocument/2006/relationships" xmlns:a="http://schemas.openxmlformats.org/drawingml/2006/main" r:embed="R958ce4181e2b4c8a">
             <a:alphaModFix amt="28000"/>
           </a:blip>
           <a:stretch xmlns:a="http://schemas.openxmlformats.org/drawingml/2006/main"/>
@@ -1899,7 +1899,7 @@
           <p:nvPr/>
         </p:nvPicPr>
         <p:blipFill rotWithShape="1">
-          <a:blip xmlns:r="http://schemas.openxmlformats.org/officeDocument/2006/relationships" xmlns:a="http://schemas.openxmlformats.org/drawingml/2006/main" r:embed="R360cd8641377412c">
+          <a:blip xmlns:r="http://schemas.openxmlformats.org/officeDocument/2006/relationships" xmlns:a="http://schemas.openxmlformats.org/drawingml/2006/main" r:embed="R78161220a0fd4042">
             <a:alphaModFix amt="28000"/>
           </a:blip>
           <a:stretch xmlns:a="http://schemas.openxmlformats.org/drawingml/2006/main"/>
@@ -2176,7 +2176,7 @@
           <p:nvPr/>
         </p:nvPicPr>
         <p:blipFill rotWithShape="1">
-          <a:blip xmlns:r="http://schemas.openxmlformats.org/officeDocument/2006/relationships" xmlns:a="http://schemas.openxmlformats.org/drawingml/2006/main" r:embed="R34f9d483166040c8">
+          <a:blip xmlns:r="http://schemas.openxmlformats.org/officeDocument/2006/relationships" xmlns:a="http://schemas.openxmlformats.org/drawingml/2006/main" r:embed="R111e422f7637480a">
             <a:alphaModFix amt="28000"/>
           </a:blip>
           <a:stretch xmlns:a="http://schemas.openxmlformats.org/drawingml/2006/main"/>
@@ -2451,7 +2451,7 @@
           <p:nvPr/>
         </p:nvPicPr>
         <p:blipFill rotWithShape="1">
-          <a:blip xmlns:r="http://schemas.openxmlformats.org/officeDocument/2006/relationships" xmlns:a="http://schemas.openxmlformats.org/drawingml/2006/main" r:embed="R0f2d80063d1942c1">
+          <a:blip xmlns:r="http://schemas.openxmlformats.org/officeDocument/2006/relationships" xmlns:a="http://schemas.openxmlformats.org/drawingml/2006/main" r:embed="R5d73f53e9895497a">
             <a:alphaModFix amt="28000"/>
           </a:blip>
           <a:stretch xmlns:a="http://schemas.openxmlformats.org/drawingml/2006/main"/>
@@ -2875,7 +2875,7 @@
           <p:nvPr/>
         </p:nvPicPr>
         <p:blipFill rotWithShape="1">
-          <a:blip xmlns:r="http://schemas.openxmlformats.org/officeDocument/2006/relationships" xmlns:a="http://schemas.openxmlformats.org/drawingml/2006/main" r:embed="R37703c90a11a4f0d">
+          <a:blip xmlns:r="http://schemas.openxmlformats.org/officeDocument/2006/relationships" xmlns:a="http://schemas.openxmlformats.org/drawingml/2006/main" r:embed="Rfe8279acc4804348">
             <a:alphaModFix amt="28000"/>
           </a:blip>
           <a:stretch xmlns:a="http://schemas.openxmlformats.org/drawingml/2006/main"/>
@@ -3016,7 +3016,7 @@
           <p:nvPr/>
         </p:nvPicPr>
         <p:blipFill rotWithShape="1">
-          <a:blip xmlns:r="http://schemas.openxmlformats.org/officeDocument/2006/relationships" xmlns:a="http://schemas.openxmlformats.org/drawingml/2006/main" r:embed="R838683df46e14d52">
+          <a:blip xmlns:r="http://schemas.openxmlformats.org/officeDocument/2006/relationships" xmlns:a="http://schemas.openxmlformats.org/drawingml/2006/main" r:embed="R67cd61f9aef543ed">
             <a:alphaModFix amt="28000"/>
           </a:blip>
           <a:stretch xmlns:a="http://schemas.openxmlformats.org/drawingml/2006/main"/>
@@ -3130,7 +3130,7 @@
           <p:nvPr/>
         </p:nvPicPr>
         <p:blipFill rotWithShape="1">
-          <a:blip xmlns:r="http://schemas.openxmlformats.org/officeDocument/2006/relationships" xmlns:a="http://schemas.openxmlformats.org/drawingml/2006/main" r:embed="Rd54fdf60c7eb4938">
+          <a:blip xmlns:r="http://schemas.openxmlformats.org/officeDocument/2006/relationships" xmlns:a="http://schemas.openxmlformats.org/drawingml/2006/main" r:embed="Rc6dc02f519ee40ac">
             <a:alphaModFix amt="28000"/>
           </a:blip>
           <a:stretch xmlns:a="http://schemas.openxmlformats.org/drawingml/2006/main"/>
@@ -3457,7 +3457,7 @@
           <p:nvPr/>
         </p:nvPicPr>
         <p:blipFill rotWithShape="1">
-          <a:blip xmlns:r="http://schemas.openxmlformats.org/officeDocument/2006/relationships" xmlns:a="http://schemas.openxmlformats.org/drawingml/2006/main" r:embed="R5f16604395d54d55">
+          <a:blip xmlns:r="http://schemas.openxmlformats.org/officeDocument/2006/relationships" xmlns:a="http://schemas.openxmlformats.org/drawingml/2006/main" r:embed="R58251649e6964da6">
             <a:alphaModFix amt="28000"/>
           </a:blip>
           <a:stretch xmlns:a="http://schemas.openxmlformats.org/drawingml/2006/main"/>
@@ -3745,7 +3745,7 @@
           <p:nvPr/>
         </p:nvPicPr>
         <p:blipFill rotWithShape="1">
-          <a:blip xmlns:r="http://schemas.openxmlformats.org/officeDocument/2006/relationships" xmlns:a="http://schemas.openxmlformats.org/drawingml/2006/main" r:embed="R43b4ef43edaf42fc">
+          <a:blip xmlns:r="http://schemas.openxmlformats.org/officeDocument/2006/relationships" xmlns:a="http://schemas.openxmlformats.org/drawingml/2006/main" r:embed="Rd00ab7529e524fc4">
             <a:alphaModFix amt="28000"/>
           </a:blip>
           <a:stretch xmlns:a="http://schemas.openxmlformats.org/drawingml/2006/main"/>
@@ -3982,17 +3982,17 @@
   </p:cSld>
   <p:clrMap bg1="lt1" tx1="dk1" bg2="lt2" tx2="dk2" accent1="accent1" accent2="accent2" accent3="accent3" accent4="accent4" accent5="accent5" accent6="accent6" hlink="hlink" folHlink="folHlink"/>
   <p:sldLayoutIdLst>
-    <p:sldLayoutId xmlns:r="http://schemas.openxmlformats.org/officeDocument/2006/relationships" id="2147483649" r:id="R0ffc2169dd7e4043"/>
-    <p:sldLayoutId xmlns:r="http://schemas.openxmlformats.org/officeDocument/2006/relationships" id="2147483650" r:id="Ref6108f2e3bb4ab0"/>
-    <p:sldLayoutId xmlns:r="http://schemas.openxmlformats.org/officeDocument/2006/relationships" id="2147483651" r:id="R1841598d3a534e12"/>
-    <p:sldLayoutId xmlns:r="http://schemas.openxmlformats.org/officeDocument/2006/relationships" id="2147483652" r:id="Rb71f6538877a4088"/>
-    <p:sldLayoutId xmlns:r="http://schemas.openxmlformats.org/officeDocument/2006/relationships" id="2147483653" r:id="Rb5cc309ef0084381"/>
-    <p:sldLayoutId xmlns:r="http://schemas.openxmlformats.org/officeDocument/2006/relationships" id="2147483654" r:id="R991be1fcbe2f4e06"/>
-    <p:sldLayoutId xmlns:r="http://schemas.openxmlformats.org/officeDocument/2006/relationships" id="2147483655" r:id="R2ff6e93189c844cd"/>
-    <p:sldLayoutId xmlns:r="http://schemas.openxmlformats.org/officeDocument/2006/relationships" id="2147483656" r:id="R4808ddd51754492d"/>
-    <p:sldLayoutId xmlns:r="http://schemas.openxmlformats.org/officeDocument/2006/relationships" id="2147483657" r:id="Rc8cdf262718442b4"/>
-    <p:sldLayoutId xmlns:r="http://schemas.openxmlformats.org/officeDocument/2006/relationships" id="2147483658" r:id="R788c4551a54d45c5"/>
-    <p:sldLayoutId xmlns:r="http://schemas.openxmlformats.org/officeDocument/2006/relationships" id="2147483659" r:id="R21ee82a56a004502"/>
+    <p:sldLayoutId xmlns:r="http://schemas.openxmlformats.org/officeDocument/2006/relationships" id="2147483649" r:id="R0de16be0cbbf43c4"/>
+    <p:sldLayoutId xmlns:r="http://schemas.openxmlformats.org/officeDocument/2006/relationships" id="2147483650" r:id="Rfa3e6fcb67ae4c4e"/>
+    <p:sldLayoutId xmlns:r="http://schemas.openxmlformats.org/officeDocument/2006/relationships" id="2147483651" r:id="Rb3d90239bb2645bd"/>
+    <p:sldLayoutId xmlns:r="http://schemas.openxmlformats.org/officeDocument/2006/relationships" id="2147483652" r:id="R0221a0679bf947ee"/>
+    <p:sldLayoutId xmlns:r="http://schemas.openxmlformats.org/officeDocument/2006/relationships" id="2147483653" r:id="Rf313e6c8032540af"/>
+    <p:sldLayoutId xmlns:r="http://schemas.openxmlformats.org/officeDocument/2006/relationships" id="2147483654" r:id="Rd71174569c4b4856"/>
+    <p:sldLayoutId xmlns:r="http://schemas.openxmlformats.org/officeDocument/2006/relationships" id="2147483655" r:id="Rde386b24203c4aae"/>
+    <p:sldLayoutId xmlns:r="http://schemas.openxmlformats.org/officeDocument/2006/relationships" id="2147483656" r:id="R5502ada9f40c400d"/>
+    <p:sldLayoutId xmlns:r="http://schemas.openxmlformats.org/officeDocument/2006/relationships" id="2147483657" r:id="R36497c566a0343ed"/>
+    <p:sldLayoutId xmlns:r="http://schemas.openxmlformats.org/officeDocument/2006/relationships" id="2147483658" r:id="R8c7732bfcd60468a"/>
+    <p:sldLayoutId xmlns:r="http://schemas.openxmlformats.org/officeDocument/2006/relationships" id="2147483659" r:id="R1bc2935d868043ac"/>
   </p:sldLayoutIdLst>
   <p:hf hdr="0" ftr="0" dt="0"/>
   <p:txStyles>
@@ -8590,51 +8590,7 @@
                 <a:ea typeface="Calibri"/>
                 <a:cs typeface="Calibri"/>
               </a:rPr>
-              <a:t>; the </a:t>
-            </a:r>
-            <a:r>
-              <a:rPr sz="2400" b="0">
-                <a:solidFill>
-                  <a:srgbClr val="067D17"/>
-                </a:solidFill>
-                <a:latin typeface="JetBrains Mono"/>
-                <a:ea typeface="JetBrains Mono"/>
-                <a:cs typeface="JetBrains Mono"/>
-              </a:rPr>
-              <a:t>"Excellent"</a:t>
-            </a:r>
-            <a:r>
-              <a:rPr sz="2400" b="0">
-                <a:solidFill>
-                  <a:srgbClr val="080808"/>
-                </a:solidFill>
-                <a:latin typeface="Calibri"/>
-                <a:ea typeface="Calibri"/>
-                <a:cs typeface="Calibri"/>
-              </a:rPr>
-              <a:t> and </a:t>
-            </a:r>
-            <a:r>
-              <a:rPr sz="2400" b="0">
-                <a:solidFill>
-                  <a:srgbClr val="067D17"/>
-                </a:solidFill>
-                <a:latin typeface="JetBrains Mono"/>
-                <a:ea typeface="JetBrains Mono"/>
-                <a:cs typeface="JetBrains Mono"/>
-              </a:rPr>
-              <a:t>"Good"</a:t>
-            </a:r>
-            <a:r>
-              <a:rPr sz="2400" b="0">
-                <a:solidFill>
-                  <a:srgbClr val="080808"/>
-                </a:solidFill>
-                <a:latin typeface="Calibri"/>
-                <a:ea typeface="Calibri"/>
-                <a:cs typeface="Calibri"/>
-              </a:rPr>
-              <a:t> outcomes stay unchanged.</a:t>
+              <a:t>; the Excellent and Good outcomes stay unchanged.</a:t>
             </a:r>
           </a:p>
         </p:txBody>
@@ -9421,73 +9377,7 @@
                 <a:ea typeface="Calibri"/>
                 <a:cs typeface="Calibri"/>
               </a:rPr>
-              <a:t>Create a temperature classifier with three outcomes: </a:t>
-            </a:r>
-            <a:r>
-              <a:rPr sz="2400" b="0">
-                <a:solidFill>
-                  <a:srgbClr val="067D17"/>
-                </a:solidFill>
-                <a:latin typeface="JetBrains Mono"/>
-                <a:ea typeface="JetBrains Mono"/>
-                <a:cs typeface="JetBrains Mono"/>
-              </a:rPr>
-              <a:t>"Hot"</a:t>
-            </a:r>
-            <a:r>
-              <a:rPr sz="2400" b="0">
-                <a:solidFill>
-                  <a:srgbClr val="080808"/>
-                </a:solidFill>
-                <a:latin typeface="Calibri"/>
-                <a:ea typeface="Calibri"/>
-                <a:cs typeface="Calibri"/>
-              </a:rPr>
-              <a:t> at 30 or above, </a:t>
-            </a:r>
-            <a:r>
-              <a:rPr sz="2400" b="0">
-                <a:solidFill>
-                  <a:srgbClr val="067D17"/>
-                </a:solidFill>
-                <a:latin typeface="JetBrains Mono"/>
-                <a:ea typeface="JetBrains Mono"/>
-                <a:cs typeface="JetBrains Mono"/>
-              </a:rPr>
-              <a:t>"Warm"</a:t>
-            </a:r>
-            <a:r>
-              <a:rPr sz="2400" b="0">
-                <a:solidFill>
-                  <a:srgbClr val="080808"/>
-                </a:solidFill>
-                <a:latin typeface="Calibri"/>
-                <a:ea typeface="Calibri"/>
-                <a:cs typeface="Calibri"/>
-              </a:rPr>
-              <a:t> from 20 to 29, and </a:t>
-            </a:r>
-            <a:r>
-              <a:rPr sz="2400" b="0">
-                <a:solidFill>
-                  <a:srgbClr val="067D17"/>
-                </a:solidFill>
-                <a:latin typeface="JetBrains Mono"/>
-                <a:ea typeface="JetBrains Mono"/>
-                <a:cs typeface="JetBrains Mono"/>
-              </a:rPr>
-              <a:t>"Cool"</a:t>
-            </a:r>
-            <a:r>
-              <a:rPr sz="2400" b="0">
-                <a:solidFill>
-                  <a:srgbClr val="080808"/>
-                </a:solidFill>
-                <a:latin typeface="Calibri"/>
-                <a:ea typeface="Calibri"/>
-                <a:cs typeface="Calibri"/>
-              </a:rPr>
-              <a:t> below 20. Test 19, 20 and 30.</a:t>
+              <a:t>Create a temperature classifier with three outcomes: Hot at 30 or above, Warm from 20 to 29, and Cool below 20. Test 19, 20 and 30.</a:t>
             </a:r>
           </a:p>
         </p:txBody>

--- a/Mapped Curriculum Lessons/Grade 6/Lesson 05 - More Decisions/More Decisions - Slides.pptx
+++ b/Mapped Curriculum Lessons/Grade 6/Lesson 05 - More Decisions/More Decisions - Slides.pptx
@@ -2,28 +2,28 @@
 <file path=ppt/presentation.xml><?xml version="1.0" encoding="utf-8"?>
 <p:presentation xmlns:p="http://schemas.openxmlformats.org/presentationml/2006/main" embedTrueTypeFonts="1" saveSubsetFonts="0">
   <p:sldMasterIdLst>
-    <p:sldMasterId xmlns:r="http://schemas.openxmlformats.org/officeDocument/2006/relationships" id="2147483648" r:id="Rd1fe34fb7dad4ee2"/>
+    <p:sldMasterId xmlns:r="http://schemas.openxmlformats.org/officeDocument/2006/relationships" id="2147483648" r:id="R75d9cbc477544ab5"/>
   </p:sldMasterIdLst>
   <p:notesMasterIdLst>
-    <p:notesMasterId xmlns:r="http://schemas.openxmlformats.org/officeDocument/2006/relationships" r:id="R559938d53583488b"/>
+    <p:notesMasterId xmlns:r="http://schemas.openxmlformats.org/officeDocument/2006/relationships" r:id="R9c469c5c9c644356"/>
   </p:notesMasterIdLst>
   <p:sldIdLst>
-    <p:sldId xmlns:r="http://schemas.openxmlformats.org/officeDocument/2006/relationships" id="256" r:id="R64ff0756df414255"/>
-    <p:sldId xmlns:r="http://schemas.openxmlformats.org/officeDocument/2006/relationships" id="257" r:id="Rc73ce508989a4d61"/>
-    <p:sldId xmlns:r="http://schemas.openxmlformats.org/officeDocument/2006/relationships" id="258" r:id="Rbc7cc33a696942df"/>
-    <p:sldId xmlns:r="http://schemas.openxmlformats.org/officeDocument/2006/relationships" id="259" r:id="R21cd30c6d4b74bdd"/>
-    <p:sldId xmlns:r="http://schemas.openxmlformats.org/officeDocument/2006/relationships" id="260" r:id="R77a3b4d643fe4063"/>
-    <p:sldId xmlns:r="http://schemas.openxmlformats.org/officeDocument/2006/relationships" id="261" r:id="R136c92cee1164e2a"/>
-    <p:sldId xmlns:r="http://schemas.openxmlformats.org/officeDocument/2006/relationships" id="262" r:id="Rf5381818d5eb4a78"/>
-    <p:sldId xmlns:r="http://schemas.openxmlformats.org/officeDocument/2006/relationships" id="263" r:id="R9219e62e3f1849f9"/>
-    <p:sldId xmlns:r="http://schemas.openxmlformats.org/officeDocument/2006/relationships" id="264" r:id="Rd9e20f72d10c4a26"/>
+    <p:sldId xmlns:r="http://schemas.openxmlformats.org/officeDocument/2006/relationships" id="256" r:id="R1eb2fca9b8574b0a"/>
+    <p:sldId xmlns:r="http://schemas.openxmlformats.org/officeDocument/2006/relationships" id="257" r:id="R9fe69a8758044b34"/>
+    <p:sldId xmlns:r="http://schemas.openxmlformats.org/officeDocument/2006/relationships" id="258" r:id="R72b8133105434ad4"/>
+    <p:sldId xmlns:r="http://schemas.openxmlformats.org/officeDocument/2006/relationships" id="259" r:id="R1450c960854d479e"/>
+    <p:sldId xmlns:r="http://schemas.openxmlformats.org/officeDocument/2006/relationships" id="260" r:id="R2fa734a2d6484df8"/>
+    <p:sldId xmlns:r="http://schemas.openxmlformats.org/officeDocument/2006/relationships" id="261" r:id="Rf18e2a3a71144ecd"/>
+    <p:sldId xmlns:r="http://schemas.openxmlformats.org/officeDocument/2006/relationships" id="262" r:id="R73c18a881d654794"/>
+    <p:sldId xmlns:r="http://schemas.openxmlformats.org/officeDocument/2006/relationships" id="263" r:id="Rbb2e516acb204776"/>
+    <p:sldId xmlns:r="http://schemas.openxmlformats.org/officeDocument/2006/relationships" id="264" r:id="R8081998e376f4422"/>
   </p:sldIdLst>
   <p:sldSz cx="12192000" cy="6858000"/>
   <p:notesSz cx="6858000" cy="9144000"/>
   <p:embeddedFontLst>
     <p:embeddedFont>
       <p:font typeface="JetBrains Mono"/>
-      <p:regular xmlns:r="http://schemas.openxmlformats.org/officeDocument/2006/relationships" r:id="Rd050465fe0084bbf"/>
+      <p:regular xmlns:r="http://schemas.openxmlformats.org/officeDocument/2006/relationships" r:id="Rb4fb04a2ca5d4607"/>
     </p:embeddedFont>
   </p:embeddedFontLst>
 </p:presentation>
@@ -1071,7 +1071,7 @@
           <p:nvPr/>
         </p:nvPicPr>
         <p:blipFill rotWithShape="1">
-          <a:blip xmlns:r="http://schemas.openxmlformats.org/officeDocument/2006/relationships" xmlns:a="http://schemas.openxmlformats.org/drawingml/2006/main" r:embed="R8aefdb88d5e548e3"/>
+          <a:blip xmlns:r="http://schemas.openxmlformats.org/officeDocument/2006/relationships" xmlns:a="http://schemas.openxmlformats.org/drawingml/2006/main" r:embed="Rcdc6052f726447e3"/>
           <a:stretch xmlns:a="http://schemas.openxmlformats.org/drawingml/2006/main"/>
         </p:blipFill>
         <p:spPr>
@@ -1451,7 +1451,7 @@
           <p:nvPr/>
         </p:nvPicPr>
         <p:blipFill rotWithShape="1">
-          <a:blip xmlns:r="http://schemas.openxmlformats.org/officeDocument/2006/relationships" xmlns:a="http://schemas.openxmlformats.org/drawingml/2006/main" r:embed="R01dce6eaa45d49b8">
+          <a:blip xmlns:r="http://schemas.openxmlformats.org/officeDocument/2006/relationships" xmlns:a="http://schemas.openxmlformats.org/drawingml/2006/main" r:embed="R5469a3cb5bf24351">
             <a:alphaModFix amt="28000"/>
           </a:blip>
           <a:stretch xmlns:a="http://schemas.openxmlformats.org/drawingml/2006/main"/>
@@ -1664,7 +1664,7 @@
           <p:nvPr/>
         </p:nvPicPr>
         <p:blipFill rotWithShape="1">
-          <a:blip xmlns:r="http://schemas.openxmlformats.org/officeDocument/2006/relationships" xmlns:a="http://schemas.openxmlformats.org/drawingml/2006/main" r:embed="R958ce4181e2b4c8a">
+          <a:blip xmlns:r="http://schemas.openxmlformats.org/officeDocument/2006/relationships" xmlns:a="http://schemas.openxmlformats.org/drawingml/2006/main" r:embed="R85f9dea01ef74782">
             <a:alphaModFix amt="28000"/>
           </a:blip>
           <a:stretch xmlns:a="http://schemas.openxmlformats.org/drawingml/2006/main"/>
@@ -1899,7 +1899,7 @@
           <p:nvPr/>
         </p:nvPicPr>
         <p:blipFill rotWithShape="1">
-          <a:blip xmlns:r="http://schemas.openxmlformats.org/officeDocument/2006/relationships" xmlns:a="http://schemas.openxmlformats.org/drawingml/2006/main" r:embed="R78161220a0fd4042">
+          <a:blip xmlns:r="http://schemas.openxmlformats.org/officeDocument/2006/relationships" xmlns:a="http://schemas.openxmlformats.org/drawingml/2006/main" r:embed="R248da2401a63409f">
             <a:alphaModFix amt="28000"/>
           </a:blip>
           <a:stretch xmlns:a="http://schemas.openxmlformats.org/drawingml/2006/main"/>
@@ -2176,7 +2176,7 @@
           <p:nvPr/>
         </p:nvPicPr>
         <p:blipFill rotWithShape="1">
-          <a:blip xmlns:r="http://schemas.openxmlformats.org/officeDocument/2006/relationships" xmlns:a="http://schemas.openxmlformats.org/drawingml/2006/main" r:embed="R111e422f7637480a">
+          <a:blip xmlns:r="http://schemas.openxmlformats.org/officeDocument/2006/relationships" xmlns:a="http://schemas.openxmlformats.org/drawingml/2006/main" r:embed="Rd7175acb4b2a4c28">
             <a:alphaModFix amt="28000"/>
           </a:blip>
           <a:stretch xmlns:a="http://schemas.openxmlformats.org/drawingml/2006/main"/>
@@ -2451,7 +2451,7 @@
           <p:nvPr/>
         </p:nvPicPr>
         <p:blipFill rotWithShape="1">
-          <a:blip xmlns:r="http://schemas.openxmlformats.org/officeDocument/2006/relationships" xmlns:a="http://schemas.openxmlformats.org/drawingml/2006/main" r:embed="R5d73f53e9895497a">
+          <a:blip xmlns:r="http://schemas.openxmlformats.org/officeDocument/2006/relationships" xmlns:a="http://schemas.openxmlformats.org/drawingml/2006/main" r:embed="Rf0002b434b46452c">
             <a:alphaModFix amt="28000"/>
           </a:blip>
           <a:stretch xmlns:a="http://schemas.openxmlformats.org/drawingml/2006/main"/>
@@ -2875,7 +2875,7 @@
           <p:nvPr/>
         </p:nvPicPr>
         <p:blipFill rotWithShape="1">
-          <a:blip xmlns:r="http://schemas.openxmlformats.org/officeDocument/2006/relationships" xmlns:a="http://schemas.openxmlformats.org/drawingml/2006/main" r:embed="Rfe8279acc4804348">
+          <a:blip xmlns:r="http://schemas.openxmlformats.org/officeDocument/2006/relationships" xmlns:a="http://schemas.openxmlformats.org/drawingml/2006/main" r:embed="Rc473dc0fd4134c4f">
             <a:alphaModFix amt="28000"/>
           </a:blip>
           <a:stretch xmlns:a="http://schemas.openxmlformats.org/drawingml/2006/main"/>
@@ -3016,7 +3016,7 @@
           <p:nvPr/>
         </p:nvPicPr>
         <p:blipFill rotWithShape="1">
-          <a:blip xmlns:r="http://schemas.openxmlformats.org/officeDocument/2006/relationships" xmlns:a="http://schemas.openxmlformats.org/drawingml/2006/main" r:embed="R67cd61f9aef543ed">
+          <a:blip xmlns:r="http://schemas.openxmlformats.org/officeDocument/2006/relationships" xmlns:a="http://schemas.openxmlformats.org/drawingml/2006/main" r:embed="R37b32380e8fb4e0f">
             <a:alphaModFix amt="28000"/>
           </a:blip>
           <a:stretch xmlns:a="http://schemas.openxmlformats.org/drawingml/2006/main"/>
@@ -3130,7 +3130,7 @@
           <p:nvPr/>
         </p:nvPicPr>
         <p:blipFill rotWithShape="1">
-          <a:blip xmlns:r="http://schemas.openxmlformats.org/officeDocument/2006/relationships" xmlns:a="http://schemas.openxmlformats.org/drawingml/2006/main" r:embed="Rc6dc02f519ee40ac">
+          <a:blip xmlns:r="http://schemas.openxmlformats.org/officeDocument/2006/relationships" xmlns:a="http://schemas.openxmlformats.org/drawingml/2006/main" r:embed="R2ec1493a06fc475c">
             <a:alphaModFix amt="28000"/>
           </a:blip>
           <a:stretch xmlns:a="http://schemas.openxmlformats.org/drawingml/2006/main"/>
@@ -3457,7 +3457,7 @@
           <p:nvPr/>
         </p:nvPicPr>
         <p:blipFill rotWithShape="1">
-          <a:blip xmlns:r="http://schemas.openxmlformats.org/officeDocument/2006/relationships" xmlns:a="http://schemas.openxmlformats.org/drawingml/2006/main" r:embed="R58251649e6964da6">
+          <a:blip xmlns:r="http://schemas.openxmlformats.org/officeDocument/2006/relationships" xmlns:a="http://schemas.openxmlformats.org/drawingml/2006/main" r:embed="R67f0e510542d416c">
             <a:alphaModFix amt="28000"/>
           </a:blip>
           <a:stretch xmlns:a="http://schemas.openxmlformats.org/drawingml/2006/main"/>
@@ -3745,7 +3745,7 @@
           <p:nvPr/>
         </p:nvPicPr>
         <p:blipFill rotWithShape="1">
-          <a:blip xmlns:r="http://schemas.openxmlformats.org/officeDocument/2006/relationships" xmlns:a="http://schemas.openxmlformats.org/drawingml/2006/main" r:embed="Rd00ab7529e524fc4">
+          <a:blip xmlns:r="http://schemas.openxmlformats.org/officeDocument/2006/relationships" xmlns:a="http://schemas.openxmlformats.org/drawingml/2006/main" r:embed="Rbb1adceca844455b">
             <a:alphaModFix amt="28000"/>
           </a:blip>
           <a:stretch xmlns:a="http://schemas.openxmlformats.org/drawingml/2006/main"/>
@@ -3982,17 +3982,17 @@
   </p:cSld>
   <p:clrMap bg1="lt1" tx1="dk1" bg2="lt2" tx2="dk2" accent1="accent1" accent2="accent2" accent3="accent3" accent4="accent4" accent5="accent5" accent6="accent6" hlink="hlink" folHlink="folHlink"/>
   <p:sldLayoutIdLst>
-    <p:sldLayoutId xmlns:r="http://schemas.openxmlformats.org/officeDocument/2006/relationships" id="2147483649" r:id="R0de16be0cbbf43c4"/>
-    <p:sldLayoutId xmlns:r="http://schemas.openxmlformats.org/officeDocument/2006/relationships" id="2147483650" r:id="Rfa3e6fcb67ae4c4e"/>
-    <p:sldLayoutId xmlns:r="http://schemas.openxmlformats.org/officeDocument/2006/relationships" id="2147483651" r:id="Rb3d90239bb2645bd"/>
-    <p:sldLayoutId xmlns:r="http://schemas.openxmlformats.org/officeDocument/2006/relationships" id="2147483652" r:id="R0221a0679bf947ee"/>
-    <p:sldLayoutId xmlns:r="http://schemas.openxmlformats.org/officeDocument/2006/relationships" id="2147483653" r:id="Rf313e6c8032540af"/>
-    <p:sldLayoutId xmlns:r="http://schemas.openxmlformats.org/officeDocument/2006/relationships" id="2147483654" r:id="Rd71174569c4b4856"/>
-    <p:sldLayoutId xmlns:r="http://schemas.openxmlformats.org/officeDocument/2006/relationships" id="2147483655" r:id="Rde386b24203c4aae"/>
-    <p:sldLayoutId xmlns:r="http://schemas.openxmlformats.org/officeDocument/2006/relationships" id="2147483656" r:id="R5502ada9f40c400d"/>
-    <p:sldLayoutId xmlns:r="http://schemas.openxmlformats.org/officeDocument/2006/relationships" id="2147483657" r:id="R36497c566a0343ed"/>
-    <p:sldLayoutId xmlns:r="http://schemas.openxmlformats.org/officeDocument/2006/relationships" id="2147483658" r:id="R8c7732bfcd60468a"/>
-    <p:sldLayoutId xmlns:r="http://schemas.openxmlformats.org/officeDocument/2006/relationships" id="2147483659" r:id="R1bc2935d868043ac"/>
+    <p:sldLayoutId xmlns:r="http://schemas.openxmlformats.org/officeDocument/2006/relationships" id="2147483649" r:id="R4c336818413d48e8"/>
+    <p:sldLayoutId xmlns:r="http://schemas.openxmlformats.org/officeDocument/2006/relationships" id="2147483650" r:id="R805a9f3b06ed4a51"/>
+    <p:sldLayoutId xmlns:r="http://schemas.openxmlformats.org/officeDocument/2006/relationships" id="2147483651" r:id="R438ad743e9f74b22"/>
+    <p:sldLayoutId xmlns:r="http://schemas.openxmlformats.org/officeDocument/2006/relationships" id="2147483652" r:id="Rdd98f29423504fd0"/>
+    <p:sldLayoutId xmlns:r="http://schemas.openxmlformats.org/officeDocument/2006/relationships" id="2147483653" r:id="R22d3b35d5ff34835"/>
+    <p:sldLayoutId xmlns:r="http://schemas.openxmlformats.org/officeDocument/2006/relationships" id="2147483654" r:id="R68d199d6a5534c86"/>
+    <p:sldLayoutId xmlns:r="http://schemas.openxmlformats.org/officeDocument/2006/relationships" id="2147483655" r:id="R97fcfbf214124e50"/>
+    <p:sldLayoutId xmlns:r="http://schemas.openxmlformats.org/officeDocument/2006/relationships" id="2147483656" r:id="R9b1333d5e42d43c4"/>
+    <p:sldLayoutId xmlns:r="http://schemas.openxmlformats.org/officeDocument/2006/relationships" id="2147483657" r:id="Rdd29c76cbb554713"/>
+    <p:sldLayoutId xmlns:r="http://schemas.openxmlformats.org/officeDocument/2006/relationships" id="2147483658" r:id="R6da8bf86f04d4f63"/>
+    <p:sldLayoutId xmlns:r="http://schemas.openxmlformats.org/officeDocument/2006/relationships" id="2147483659" r:id="R660da1439f0e4ab7"/>
   </p:sldLayoutIdLst>
   <p:hf hdr="0" ftr="0" dt="0"/>
   <p:txStyles>

--- a/Mapped Curriculum Lessons/Grade 6/Lesson 05 - More Decisions/More Decisions - Slides.pptx
+++ b/Mapped Curriculum Lessons/Grade 6/Lesson 05 - More Decisions/More Decisions - Slides.pptx
@@ -2,28 +2,28 @@
 <file path=ppt/presentation.xml><?xml version="1.0" encoding="utf-8"?>
 <p:presentation xmlns:p="http://schemas.openxmlformats.org/presentationml/2006/main" embedTrueTypeFonts="1" saveSubsetFonts="0">
   <p:sldMasterIdLst>
-    <p:sldMasterId xmlns:r="http://schemas.openxmlformats.org/officeDocument/2006/relationships" id="2147483648" r:id="R75d9cbc477544ab5"/>
+    <p:sldMasterId xmlns:r="http://schemas.openxmlformats.org/officeDocument/2006/relationships" id="2147483648" r:id="R4e877905127c441b"/>
   </p:sldMasterIdLst>
   <p:notesMasterIdLst>
-    <p:notesMasterId xmlns:r="http://schemas.openxmlformats.org/officeDocument/2006/relationships" r:id="R9c469c5c9c644356"/>
+    <p:notesMasterId xmlns:r="http://schemas.openxmlformats.org/officeDocument/2006/relationships" r:id="R6f3e811752cd48d3"/>
   </p:notesMasterIdLst>
   <p:sldIdLst>
-    <p:sldId xmlns:r="http://schemas.openxmlformats.org/officeDocument/2006/relationships" id="256" r:id="R1eb2fca9b8574b0a"/>
-    <p:sldId xmlns:r="http://schemas.openxmlformats.org/officeDocument/2006/relationships" id="257" r:id="R9fe69a8758044b34"/>
-    <p:sldId xmlns:r="http://schemas.openxmlformats.org/officeDocument/2006/relationships" id="258" r:id="R72b8133105434ad4"/>
-    <p:sldId xmlns:r="http://schemas.openxmlformats.org/officeDocument/2006/relationships" id="259" r:id="R1450c960854d479e"/>
-    <p:sldId xmlns:r="http://schemas.openxmlformats.org/officeDocument/2006/relationships" id="260" r:id="R2fa734a2d6484df8"/>
-    <p:sldId xmlns:r="http://schemas.openxmlformats.org/officeDocument/2006/relationships" id="261" r:id="Rf18e2a3a71144ecd"/>
-    <p:sldId xmlns:r="http://schemas.openxmlformats.org/officeDocument/2006/relationships" id="262" r:id="R73c18a881d654794"/>
-    <p:sldId xmlns:r="http://schemas.openxmlformats.org/officeDocument/2006/relationships" id="263" r:id="Rbb2e516acb204776"/>
-    <p:sldId xmlns:r="http://schemas.openxmlformats.org/officeDocument/2006/relationships" id="264" r:id="R8081998e376f4422"/>
+    <p:sldId xmlns:r="http://schemas.openxmlformats.org/officeDocument/2006/relationships" id="256" r:id="R1d360c3efd984064"/>
+    <p:sldId xmlns:r="http://schemas.openxmlformats.org/officeDocument/2006/relationships" id="257" r:id="R825b8bdcfa814e53"/>
+    <p:sldId xmlns:r="http://schemas.openxmlformats.org/officeDocument/2006/relationships" id="258" r:id="R109db7b3a7ca4e46"/>
+    <p:sldId xmlns:r="http://schemas.openxmlformats.org/officeDocument/2006/relationships" id="259" r:id="Rff019f9c767d491c"/>
+    <p:sldId xmlns:r="http://schemas.openxmlformats.org/officeDocument/2006/relationships" id="260" r:id="Rf2a2c66d4b074b06"/>
+    <p:sldId xmlns:r="http://schemas.openxmlformats.org/officeDocument/2006/relationships" id="261" r:id="R8119a664485841b9"/>
+    <p:sldId xmlns:r="http://schemas.openxmlformats.org/officeDocument/2006/relationships" id="262" r:id="Rfcfeffaff1e94980"/>
+    <p:sldId xmlns:r="http://schemas.openxmlformats.org/officeDocument/2006/relationships" id="263" r:id="R34330e751d5841cf"/>
+    <p:sldId xmlns:r="http://schemas.openxmlformats.org/officeDocument/2006/relationships" id="264" r:id="Rfa8e7b7555b84691"/>
   </p:sldIdLst>
   <p:sldSz cx="12192000" cy="6858000"/>
   <p:notesSz cx="6858000" cy="9144000"/>
   <p:embeddedFontLst>
     <p:embeddedFont>
       <p:font typeface="JetBrains Mono"/>
-      <p:regular xmlns:r="http://schemas.openxmlformats.org/officeDocument/2006/relationships" r:id="Rb4fb04a2ca5d4607"/>
+      <p:regular xmlns:r="http://schemas.openxmlformats.org/officeDocument/2006/relationships" r:id="R8432c98882244c04"/>
     </p:embeddedFont>
   </p:embeddedFontLst>
 </p:presentation>
@@ -1071,7 +1071,7 @@
           <p:nvPr/>
         </p:nvPicPr>
         <p:blipFill rotWithShape="1">
-          <a:blip xmlns:r="http://schemas.openxmlformats.org/officeDocument/2006/relationships" xmlns:a="http://schemas.openxmlformats.org/drawingml/2006/main" r:embed="Rcdc6052f726447e3"/>
+          <a:blip xmlns:r="http://schemas.openxmlformats.org/officeDocument/2006/relationships" xmlns:a="http://schemas.openxmlformats.org/drawingml/2006/main" r:embed="Rc7c76d5a57dd4216"/>
           <a:stretch xmlns:a="http://schemas.openxmlformats.org/drawingml/2006/main"/>
         </p:blipFill>
         <p:spPr>
@@ -1451,7 +1451,7 @@
           <p:nvPr/>
         </p:nvPicPr>
         <p:blipFill rotWithShape="1">
-          <a:blip xmlns:r="http://schemas.openxmlformats.org/officeDocument/2006/relationships" xmlns:a="http://schemas.openxmlformats.org/drawingml/2006/main" r:embed="R5469a3cb5bf24351">
+          <a:blip xmlns:r="http://schemas.openxmlformats.org/officeDocument/2006/relationships" xmlns:a="http://schemas.openxmlformats.org/drawingml/2006/main" r:embed="R59592a4579d544d5">
             <a:alphaModFix amt="28000"/>
           </a:blip>
           <a:stretch xmlns:a="http://schemas.openxmlformats.org/drawingml/2006/main"/>
@@ -1664,7 +1664,7 @@
           <p:nvPr/>
         </p:nvPicPr>
         <p:blipFill rotWithShape="1">
-          <a:blip xmlns:r="http://schemas.openxmlformats.org/officeDocument/2006/relationships" xmlns:a="http://schemas.openxmlformats.org/drawingml/2006/main" r:embed="R85f9dea01ef74782">
+          <a:blip xmlns:r="http://schemas.openxmlformats.org/officeDocument/2006/relationships" xmlns:a="http://schemas.openxmlformats.org/drawingml/2006/main" r:embed="Rf0fa009c23c347ea">
             <a:alphaModFix amt="28000"/>
           </a:blip>
           <a:stretch xmlns:a="http://schemas.openxmlformats.org/drawingml/2006/main"/>
@@ -1899,7 +1899,7 @@
           <p:nvPr/>
         </p:nvPicPr>
         <p:blipFill rotWithShape="1">
-          <a:blip xmlns:r="http://schemas.openxmlformats.org/officeDocument/2006/relationships" xmlns:a="http://schemas.openxmlformats.org/drawingml/2006/main" r:embed="R248da2401a63409f">
+          <a:blip xmlns:r="http://schemas.openxmlformats.org/officeDocument/2006/relationships" xmlns:a="http://schemas.openxmlformats.org/drawingml/2006/main" r:embed="Rcf9c340c7dfd456d">
             <a:alphaModFix amt="28000"/>
           </a:blip>
           <a:stretch xmlns:a="http://schemas.openxmlformats.org/drawingml/2006/main"/>
@@ -2176,7 +2176,7 @@
           <p:nvPr/>
         </p:nvPicPr>
         <p:blipFill rotWithShape="1">
-          <a:blip xmlns:r="http://schemas.openxmlformats.org/officeDocument/2006/relationships" xmlns:a="http://schemas.openxmlformats.org/drawingml/2006/main" r:embed="Rd7175acb4b2a4c28">
+          <a:blip xmlns:r="http://schemas.openxmlformats.org/officeDocument/2006/relationships" xmlns:a="http://schemas.openxmlformats.org/drawingml/2006/main" r:embed="Rcb6ab369114f4988">
             <a:alphaModFix amt="28000"/>
           </a:blip>
           <a:stretch xmlns:a="http://schemas.openxmlformats.org/drawingml/2006/main"/>
@@ -2451,7 +2451,7 @@
           <p:nvPr/>
         </p:nvPicPr>
         <p:blipFill rotWithShape="1">
-          <a:blip xmlns:r="http://schemas.openxmlformats.org/officeDocument/2006/relationships" xmlns:a="http://schemas.openxmlformats.org/drawingml/2006/main" r:embed="Rf0002b434b46452c">
+          <a:blip xmlns:r="http://schemas.openxmlformats.org/officeDocument/2006/relationships" xmlns:a="http://schemas.openxmlformats.org/drawingml/2006/main" r:embed="R38d7c12606f34476">
             <a:alphaModFix amt="28000"/>
           </a:blip>
           <a:stretch xmlns:a="http://schemas.openxmlformats.org/drawingml/2006/main"/>
@@ -2875,7 +2875,7 @@
           <p:nvPr/>
         </p:nvPicPr>
         <p:blipFill rotWithShape="1">
-          <a:blip xmlns:r="http://schemas.openxmlformats.org/officeDocument/2006/relationships" xmlns:a="http://schemas.openxmlformats.org/drawingml/2006/main" r:embed="Rc473dc0fd4134c4f">
+          <a:blip xmlns:r="http://schemas.openxmlformats.org/officeDocument/2006/relationships" xmlns:a="http://schemas.openxmlformats.org/drawingml/2006/main" r:embed="Ra4eb4832c1dd4a01">
             <a:alphaModFix amt="28000"/>
           </a:blip>
           <a:stretch xmlns:a="http://schemas.openxmlformats.org/drawingml/2006/main"/>
@@ -3016,7 +3016,7 @@
           <p:nvPr/>
         </p:nvPicPr>
         <p:blipFill rotWithShape="1">
-          <a:blip xmlns:r="http://schemas.openxmlformats.org/officeDocument/2006/relationships" xmlns:a="http://schemas.openxmlformats.org/drawingml/2006/main" r:embed="R37b32380e8fb4e0f">
+          <a:blip xmlns:r="http://schemas.openxmlformats.org/officeDocument/2006/relationships" xmlns:a="http://schemas.openxmlformats.org/drawingml/2006/main" r:embed="Rca5a5bb17c864bd4">
             <a:alphaModFix amt="28000"/>
           </a:blip>
           <a:stretch xmlns:a="http://schemas.openxmlformats.org/drawingml/2006/main"/>
@@ -3130,7 +3130,7 @@
           <p:nvPr/>
         </p:nvPicPr>
         <p:blipFill rotWithShape="1">
-          <a:blip xmlns:r="http://schemas.openxmlformats.org/officeDocument/2006/relationships" xmlns:a="http://schemas.openxmlformats.org/drawingml/2006/main" r:embed="R2ec1493a06fc475c">
+          <a:blip xmlns:r="http://schemas.openxmlformats.org/officeDocument/2006/relationships" xmlns:a="http://schemas.openxmlformats.org/drawingml/2006/main" r:embed="R0cc62261c4fa413a">
             <a:alphaModFix amt="28000"/>
           </a:blip>
           <a:stretch xmlns:a="http://schemas.openxmlformats.org/drawingml/2006/main"/>
@@ -3457,7 +3457,7 @@
           <p:nvPr/>
         </p:nvPicPr>
         <p:blipFill rotWithShape="1">
-          <a:blip xmlns:r="http://schemas.openxmlformats.org/officeDocument/2006/relationships" xmlns:a="http://schemas.openxmlformats.org/drawingml/2006/main" r:embed="R67f0e510542d416c">
+          <a:blip xmlns:r="http://schemas.openxmlformats.org/officeDocument/2006/relationships" xmlns:a="http://schemas.openxmlformats.org/drawingml/2006/main" r:embed="R3583b3a2154f4585">
             <a:alphaModFix amt="28000"/>
           </a:blip>
           <a:stretch xmlns:a="http://schemas.openxmlformats.org/drawingml/2006/main"/>
@@ -3745,7 +3745,7 @@
           <p:nvPr/>
         </p:nvPicPr>
         <p:blipFill rotWithShape="1">
-          <a:blip xmlns:r="http://schemas.openxmlformats.org/officeDocument/2006/relationships" xmlns:a="http://schemas.openxmlformats.org/drawingml/2006/main" r:embed="Rbb1adceca844455b">
+          <a:blip xmlns:r="http://schemas.openxmlformats.org/officeDocument/2006/relationships" xmlns:a="http://schemas.openxmlformats.org/drawingml/2006/main" r:embed="R07898680a2a848ba">
             <a:alphaModFix amt="28000"/>
           </a:blip>
           <a:stretch xmlns:a="http://schemas.openxmlformats.org/drawingml/2006/main"/>
@@ -3982,17 +3982,17 @@
   </p:cSld>
   <p:clrMap bg1="lt1" tx1="dk1" bg2="lt2" tx2="dk2" accent1="accent1" accent2="accent2" accent3="accent3" accent4="accent4" accent5="accent5" accent6="accent6" hlink="hlink" folHlink="folHlink"/>
   <p:sldLayoutIdLst>
-    <p:sldLayoutId xmlns:r="http://schemas.openxmlformats.org/officeDocument/2006/relationships" id="2147483649" r:id="R4c336818413d48e8"/>
-    <p:sldLayoutId xmlns:r="http://schemas.openxmlformats.org/officeDocument/2006/relationships" id="2147483650" r:id="R805a9f3b06ed4a51"/>
-    <p:sldLayoutId xmlns:r="http://schemas.openxmlformats.org/officeDocument/2006/relationships" id="2147483651" r:id="R438ad743e9f74b22"/>
-    <p:sldLayoutId xmlns:r="http://schemas.openxmlformats.org/officeDocument/2006/relationships" id="2147483652" r:id="Rdd98f29423504fd0"/>
-    <p:sldLayoutId xmlns:r="http://schemas.openxmlformats.org/officeDocument/2006/relationships" id="2147483653" r:id="R22d3b35d5ff34835"/>
-    <p:sldLayoutId xmlns:r="http://schemas.openxmlformats.org/officeDocument/2006/relationships" id="2147483654" r:id="R68d199d6a5534c86"/>
-    <p:sldLayoutId xmlns:r="http://schemas.openxmlformats.org/officeDocument/2006/relationships" id="2147483655" r:id="R97fcfbf214124e50"/>
-    <p:sldLayoutId xmlns:r="http://schemas.openxmlformats.org/officeDocument/2006/relationships" id="2147483656" r:id="R9b1333d5e42d43c4"/>
-    <p:sldLayoutId xmlns:r="http://schemas.openxmlformats.org/officeDocument/2006/relationships" id="2147483657" r:id="Rdd29c76cbb554713"/>
-    <p:sldLayoutId xmlns:r="http://schemas.openxmlformats.org/officeDocument/2006/relationships" id="2147483658" r:id="R6da8bf86f04d4f63"/>
-    <p:sldLayoutId xmlns:r="http://schemas.openxmlformats.org/officeDocument/2006/relationships" id="2147483659" r:id="R660da1439f0e4ab7"/>
+    <p:sldLayoutId xmlns:r="http://schemas.openxmlformats.org/officeDocument/2006/relationships" id="2147483649" r:id="R092f653d2c184255"/>
+    <p:sldLayoutId xmlns:r="http://schemas.openxmlformats.org/officeDocument/2006/relationships" id="2147483650" r:id="R7d4bb86e7b184184"/>
+    <p:sldLayoutId xmlns:r="http://schemas.openxmlformats.org/officeDocument/2006/relationships" id="2147483651" r:id="Rb356673bdabb4cd7"/>
+    <p:sldLayoutId xmlns:r="http://schemas.openxmlformats.org/officeDocument/2006/relationships" id="2147483652" r:id="R31b36b6f619f487e"/>
+    <p:sldLayoutId xmlns:r="http://schemas.openxmlformats.org/officeDocument/2006/relationships" id="2147483653" r:id="Rf4fd0dd6cbf44fc8"/>
+    <p:sldLayoutId xmlns:r="http://schemas.openxmlformats.org/officeDocument/2006/relationships" id="2147483654" r:id="Rc0ccbe0dc53a4706"/>
+    <p:sldLayoutId xmlns:r="http://schemas.openxmlformats.org/officeDocument/2006/relationships" id="2147483655" r:id="R6ab19fbcd1ef4ff2"/>
+    <p:sldLayoutId xmlns:r="http://schemas.openxmlformats.org/officeDocument/2006/relationships" id="2147483656" r:id="R9ffc207c1419420b"/>
+    <p:sldLayoutId xmlns:r="http://schemas.openxmlformats.org/officeDocument/2006/relationships" id="2147483657" r:id="Re569085160a34989"/>
+    <p:sldLayoutId xmlns:r="http://schemas.openxmlformats.org/officeDocument/2006/relationships" id="2147483658" r:id="Rf299254f29094f64"/>
+    <p:sldLayoutId xmlns:r="http://schemas.openxmlformats.org/officeDocument/2006/relationships" id="2147483659" r:id="Rd047d83793b4423c"/>
   </p:sldLayoutIdLst>
   <p:hf hdr="0" ftr="0" dt="0"/>
   <p:txStyles>
@@ -7715,10 +7715,10 @@
                 <a:ea typeface="Calibri"/>
                 <a:cs typeface="Calibri"/>
               </a:rPr>
-              <a:t>Change the program so a score of 9 displays </a:t>
-            </a:r>
-            <a:r>
-              <a:rPr sz="2400" b="0">
+              <a:t>Change the example so both comparisons use &gt; instead of &gt;=. Choose new numbers so every score still gets the same message as before. Test 8 and 5; they should still display </a:t>
+            </a:r>
+            <a:r>
+              <a:rPr sz="2050" b="0">
                 <a:solidFill>
                   <a:srgbClr val="067D17"/>
                 </a:solidFill>
@@ -7737,7 +7737,29 @@
                 <a:ea typeface="Calibri"/>
                 <a:cs typeface="Calibri"/>
               </a:rPr>
-              <a:t>. Test scores 8 and 9.</a:t>
+              <a:t> and </a:t>
+            </a:r>
+            <a:r>
+              <a:rPr sz="2050" b="0">
+                <a:solidFill>
+                  <a:srgbClr val="067D17"/>
+                </a:solidFill>
+                <a:latin typeface="JetBrains Mono"/>
+                <a:ea typeface="JetBrains Mono"/>
+                <a:cs typeface="JetBrains Mono"/>
+              </a:rPr>
+              <a:t>"Good"</a:t>
+            </a:r>
+            <a:r>
+              <a:rPr sz="2400" b="0">
+                <a:solidFill>
+                  <a:srgbClr val="080808"/>
+                </a:solidFill>
+                <a:latin typeface="Calibri"/>
+                <a:ea typeface="Calibri"/>
+                <a:cs typeface="Calibri"/>
+              </a:rPr>
+              <a:t>.</a:t>
             </a:r>
           </a:p>
         </p:txBody>
@@ -8524,10 +8546,10 @@
                 <a:ea typeface="Calibri"/>
                 <a:cs typeface="Calibri"/>
               </a:rPr>
-              <a:t>Add one </a:t>
-            </a:r>
-            <a:r>
-              <a:rPr sz="2400" b="0">
+              <a:t>Extend the example with another </a:t>
+            </a:r>
+            <a:r>
+              <a:rPr sz="2050" b="0">
                 <a:solidFill>
                   <a:srgbClr val="1750EB"/>
                 </a:solidFill>
@@ -8546,10 +8568,10 @@
                 <a:ea typeface="Calibri"/>
                 <a:cs typeface="Calibri"/>
               </a:rPr>
-              <a:t> branch so scores 3 and 4 display </a:t>
-            </a:r>
-            <a:r>
-              <a:rPr sz="2400" b="0">
+              <a:t> condition so scores 3 and 4 display </a:t>
+            </a:r>
+            <a:r>
+              <a:rPr sz="2050" b="0">
                 <a:solidFill>
                   <a:srgbClr val="067D17"/>
                 </a:solidFill>
@@ -8568,18 +8590,18 @@
                 <a:ea typeface="Calibri"/>
                 <a:cs typeface="Calibri"/>
               </a:rPr>
-              <a:t>. Scores below 3 should display </a:t>
-            </a:r>
-            <a:r>
-              <a:rPr sz="2400" b="0">
-                <a:solidFill>
-                  <a:srgbClr val="067D17"/>
-                </a:solidFill>
-                <a:latin typeface="JetBrains Mono"/>
-                <a:ea typeface="JetBrains Mono"/>
-                <a:cs typeface="JetBrains Mono"/>
-              </a:rPr>
-              <a:t>"Try again"</a:t>
+              <a:t>. Change the </a:t>
+            </a:r>
+            <a:r>
+              <a:rPr sz="2050" b="0">
+                <a:solidFill>
+                  <a:srgbClr val="1750EB"/>
+                </a:solidFill>
+                <a:latin typeface="JetBrains Mono"/>
+                <a:ea typeface="JetBrains Mono"/>
+                <a:cs typeface="JetBrains Mono"/>
+              </a:rPr>
+              <a:t>else</a:t>
             </a:r>
             <a:r>
               <a:rPr sz="2400" b="0">
@@ -8590,7 +8612,73 @@
                 <a:ea typeface="Calibri"/>
                 <a:cs typeface="Calibri"/>
               </a:rPr>
-              <a:t>; the Excellent and Good outcomes stay unchanged.</a:t>
+              <a:t> message to </a:t>
+            </a:r>
+            <a:r>
+              <a:rPr sz="2050" b="0">
+                <a:solidFill>
+                  <a:srgbClr val="067D17"/>
+                </a:solidFill>
+                <a:latin typeface="JetBrains Mono"/>
+                <a:ea typeface="JetBrains Mono"/>
+                <a:cs typeface="JetBrains Mono"/>
+              </a:rPr>
+              <a:t>"Try again"</a:t>
+            </a:r>
+            <a:r>
+              <a:rPr sz="2400" b="0">
+                <a:solidFill>
+                  <a:srgbClr val="080808"/>
+                </a:solidFill>
+                <a:latin typeface="Calibri"/>
+                <a:ea typeface="Calibri"/>
+                <a:cs typeface="Calibri"/>
+              </a:rPr>
+              <a:t>. For example, 4 displays </a:t>
+            </a:r>
+            <a:r>
+              <a:rPr sz="2050" b="0">
+                <a:solidFill>
+                  <a:srgbClr val="067D17"/>
+                </a:solidFill>
+                <a:latin typeface="JetBrains Mono"/>
+                <a:ea typeface="JetBrains Mono"/>
+                <a:cs typeface="JetBrains Mono"/>
+              </a:rPr>
+              <a:t>"Keep practising"</a:t>
+            </a:r>
+            <a:r>
+              <a:rPr sz="2400" b="0">
+                <a:solidFill>
+                  <a:srgbClr val="080808"/>
+                </a:solidFill>
+                <a:latin typeface="Calibri"/>
+                <a:ea typeface="Calibri"/>
+                <a:cs typeface="Calibri"/>
+              </a:rPr>
+              <a:t> and 2 displays </a:t>
+            </a:r>
+            <a:r>
+              <a:rPr sz="2050" b="0">
+                <a:solidFill>
+                  <a:srgbClr val="067D17"/>
+                </a:solidFill>
+                <a:latin typeface="JetBrains Mono"/>
+                <a:ea typeface="JetBrains Mono"/>
+                <a:cs typeface="JetBrains Mono"/>
+              </a:rPr>
+              <a:t>"Try again"</a:t>
+            </a:r>
+            <a:r>
+              <a:rPr sz="2400" b="0">
+                <a:solidFill>
+                  <a:srgbClr val="080808"/>
+                </a:solidFill>
+                <a:latin typeface="Calibri"/>
+                <a:ea typeface="Calibri"/>
+                <a:cs typeface="Calibri"/>
+              </a:rPr>
+              <a:t>.</a:t>
             </a:r>
           </a:p>
         </p:txBody>
@@ -9377,7 +9465,183 @@
                 <a:ea typeface="Calibri"/>
                 <a:cs typeface="Calibri"/>
               </a:rPr>
-              <a:t>Create a temperature classifier with three outcomes: Hot at 30 or above, Warm from 20 to 29, and Cool below 20. Test 19, 20 and 30.</a:t>
+              <a:t>Create a program that asks for a whole-number temperature. Use </a:t>
+            </a:r>
+            <a:r>
+              <a:rPr sz="2050" b="0">
+                <a:solidFill>
+                  <a:srgbClr val="1750EB"/>
+                </a:solidFill>
+                <a:latin typeface="JetBrains Mono"/>
+                <a:ea typeface="JetBrains Mono"/>
+                <a:cs typeface="JetBrains Mono"/>
+              </a:rPr>
+              <a:t>if</a:t>
+            </a:r>
+            <a:r>
+              <a:rPr sz="2400" b="0">
+                <a:solidFill>
+                  <a:srgbClr val="080808"/>
+                </a:solidFill>
+                <a:latin typeface="Calibri"/>
+                <a:ea typeface="Calibri"/>
+                <a:cs typeface="Calibri"/>
+              </a:rPr>
+              <a:t>, </a:t>
+            </a:r>
+            <a:r>
+              <a:rPr sz="2050" b="0">
+                <a:solidFill>
+                  <a:srgbClr val="1750EB"/>
+                </a:solidFill>
+                <a:latin typeface="JetBrains Mono"/>
+                <a:ea typeface="JetBrains Mono"/>
+                <a:cs typeface="JetBrains Mono"/>
+              </a:rPr>
+              <a:t>elif</a:t>
+            </a:r>
+            <a:r>
+              <a:rPr sz="2400" b="0">
+                <a:solidFill>
+                  <a:srgbClr val="080808"/>
+                </a:solidFill>
+                <a:latin typeface="Calibri"/>
+                <a:ea typeface="Calibri"/>
+                <a:cs typeface="Calibri"/>
+              </a:rPr>
+              <a:t> and </a:t>
+            </a:r>
+            <a:r>
+              <a:rPr sz="2050" b="0">
+                <a:solidFill>
+                  <a:srgbClr val="1750EB"/>
+                </a:solidFill>
+                <a:latin typeface="JetBrains Mono"/>
+                <a:ea typeface="JetBrains Mono"/>
+                <a:cs typeface="JetBrains Mono"/>
+              </a:rPr>
+              <a:t>else</a:t>
+            </a:r>
+            <a:r>
+              <a:rPr sz="2400" b="0">
+                <a:solidFill>
+                  <a:srgbClr val="080808"/>
+                </a:solidFill>
+                <a:latin typeface="Calibri"/>
+                <a:ea typeface="Calibri"/>
+                <a:cs typeface="Calibri"/>
+              </a:rPr>
+              <a:t> to display </a:t>
+            </a:r>
+            <a:r>
+              <a:rPr sz="2050" b="0">
+                <a:solidFill>
+                  <a:srgbClr val="067D17"/>
+                </a:solidFill>
+                <a:latin typeface="JetBrains Mono"/>
+                <a:ea typeface="JetBrains Mono"/>
+                <a:cs typeface="JetBrains Mono"/>
+              </a:rPr>
+              <a:t>"Hot"</a:t>
+            </a:r>
+            <a:r>
+              <a:rPr sz="2400" b="0">
+                <a:solidFill>
+                  <a:srgbClr val="080808"/>
+                </a:solidFill>
+                <a:latin typeface="Calibri"/>
+                <a:ea typeface="Calibri"/>
+                <a:cs typeface="Calibri"/>
+              </a:rPr>
+              <a:t> for 30 or above, </a:t>
+            </a:r>
+            <a:r>
+              <a:rPr sz="2050" b="0">
+                <a:solidFill>
+                  <a:srgbClr val="067D17"/>
+                </a:solidFill>
+                <a:latin typeface="JetBrains Mono"/>
+                <a:ea typeface="JetBrains Mono"/>
+                <a:cs typeface="JetBrains Mono"/>
+              </a:rPr>
+              <a:t>"Warm"</a:t>
+            </a:r>
+            <a:r>
+              <a:rPr sz="2400" b="0">
+                <a:solidFill>
+                  <a:srgbClr val="080808"/>
+                </a:solidFill>
+                <a:latin typeface="Calibri"/>
+                <a:ea typeface="Calibri"/>
+                <a:cs typeface="Calibri"/>
+              </a:rPr>
+              <a:t> for 20 to 29, </a:t>
+            </a:r>
+            <a:r>
+              <a:rPr sz="2050" b="0">
+                <a:solidFill>
+                  <a:srgbClr val="067D17"/>
+                </a:solidFill>
+                <a:latin typeface="JetBrains Mono"/>
+                <a:ea typeface="JetBrains Mono"/>
+                <a:cs typeface="JetBrains Mono"/>
+              </a:rPr>
+              <a:t>"Freezing"</a:t>
+            </a:r>
+            <a:r>
+              <a:rPr sz="2400" b="0">
+                <a:solidFill>
+                  <a:srgbClr val="080808"/>
+                </a:solidFill>
+                <a:latin typeface="Calibri"/>
+                <a:ea typeface="Calibri"/>
+                <a:cs typeface="Calibri"/>
+              </a:rPr>
+              <a:t> below 0 and </a:t>
+            </a:r>
+            <a:r>
+              <a:rPr sz="2050" b="0">
+                <a:solidFill>
+                  <a:srgbClr val="067D17"/>
+                </a:solidFill>
+                <a:latin typeface="JetBrains Mono"/>
+                <a:ea typeface="JetBrains Mono"/>
+                <a:cs typeface="JetBrains Mono"/>
+              </a:rPr>
+              <a:t>"Cool"</a:t>
+            </a:r>
+            <a:r>
+              <a:rPr sz="2400" b="0">
+                <a:solidFill>
+                  <a:srgbClr val="080808"/>
+                </a:solidFill>
+                <a:latin typeface="Calibri"/>
+                <a:ea typeface="Calibri"/>
+                <a:cs typeface="Calibri"/>
+              </a:rPr>
+              <a:t> for anything </a:t>
+            </a:r>
+            <a:r>
+              <a:rPr sz="2050" b="0">
+                <a:solidFill>
+                  <a:srgbClr val="1750EB"/>
+                </a:solidFill>
+                <a:latin typeface="JetBrains Mono"/>
+                <a:ea typeface="JetBrains Mono"/>
+                <a:cs typeface="JetBrains Mono"/>
+              </a:rPr>
+              <a:t>else</a:t>
+            </a:r>
+            <a:r>
+              <a:rPr sz="2400" b="0">
+                <a:solidFill>
+                  <a:srgbClr val="080808"/>
+                </a:solidFill>
+                <a:latin typeface="Calibri"/>
+                <a:ea typeface="Calibri"/>
+                <a:cs typeface="Calibri"/>
+              </a:rPr>
+              <a:t>. Test 30, 20, 5 and -3.</a:t>
             </a:r>
           </a:p>
         </p:txBody>

--- a/Mapped Curriculum Lessons/Grade 6/Lesson 05 - More Decisions/More Decisions - Slides.pptx
+++ b/Mapped Curriculum Lessons/Grade 6/Lesson 05 - More Decisions/More Decisions - Slides.pptx
@@ -2,28 +2,28 @@
 <file path=ppt/presentation.xml><?xml version="1.0" encoding="utf-8"?>
 <p:presentation xmlns:p="http://schemas.openxmlformats.org/presentationml/2006/main" embedTrueTypeFonts="1" saveSubsetFonts="0">
   <p:sldMasterIdLst>
-    <p:sldMasterId xmlns:r="http://schemas.openxmlformats.org/officeDocument/2006/relationships" id="2147483648" r:id="R4e877905127c441b"/>
+    <p:sldMasterId xmlns:r="http://schemas.openxmlformats.org/officeDocument/2006/relationships" id="2147483648" r:id="Rc610bc347ea94c91"/>
   </p:sldMasterIdLst>
   <p:notesMasterIdLst>
-    <p:notesMasterId xmlns:r="http://schemas.openxmlformats.org/officeDocument/2006/relationships" r:id="R6f3e811752cd48d3"/>
+    <p:notesMasterId xmlns:r="http://schemas.openxmlformats.org/officeDocument/2006/relationships" r:id="R08f9daa72577496f"/>
   </p:notesMasterIdLst>
   <p:sldIdLst>
-    <p:sldId xmlns:r="http://schemas.openxmlformats.org/officeDocument/2006/relationships" id="256" r:id="R1d360c3efd984064"/>
-    <p:sldId xmlns:r="http://schemas.openxmlformats.org/officeDocument/2006/relationships" id="257" r:id="R825b8bdcfa814e53"/>
-    <p:sldId xmlns:r="http://schemas.openxmlformats.org/officeDocument/2006/relationships" id="258" r:id="R109db7b3a7ca4e46"/>
-    <p:sldId xmlns:r="http://schemas.openxmlformats.org/officeDocument/2006/relationships" id="259" r:id="Rff019f9c767d491c"/>
-    <p:sldId xmlns:r="http://schemas.openxmlformats.org/officeDocument/2006/relationships" id="260" r:id="Rf2a2c66d4b074b06"/>
-    <p:sldId xmlns:r="http://schemas.openxmlformats.org/officeDocument/2006/relationships" id="261" r:id="R8119a664485841b9"/>
-    <p:sldId xmlns:r="http://schemas.openxmlformats.org/officeDocument/2006/relationships" id="262" r:id="Rfcfeffaff1e94980"/>
-    <p:sldId xmlns:r="http://schemas.openxmlformats.org/officeDocument/2006/relationships" id="263" r:id="R34330e751d5841cf"/>
-    <p:sldId xmlns:r="http://schemas.openxmlformats.org/officeDocument/2006/relationships" id="264" r:id="Rfa8e7b7555b84691"/>
+    <p:sldId xmlns:r="http://schemas.openxmlformats.org/officeDocument/2006/relationships" id="256" r:id="R6e84a3f425ea45d1"/>
+    <p:sldId xmlns:r="http://schemas.openxmlformats.org/officeDocument/2006/relationships" id="257" r:id="R6c4e2c87fc81490d"/>
+    <p:sldId xmlns:r="http://schemas.openxmlformats.org/officeDocument/2006/relationships" id="258" r:id="R12146313d9894ddd"/>
+    <p:sldId xmlns:r="http://schemas.openxmlformats.org/officeDocument/2006/relationships" id="259" r:id="Rdecd5f46a0694dcd"/>
+    <p:sldId xmlns:r="http://schemas.openxmlformats.org/officeDocument/2006/relationships" id="260" r:id="R7ff33b49ecca4274"/>
+    <p:sldId xmlns:r="http://schemas.openxmlformats.org/officeDocument/2006/relationships" id="261" r:id="R57d9884530dd4207"/>
+    <p:sldId xmlns:r="http://schemas.openxmlformats.org/officeDocument/2006/relationships" id="262" r:id="R19cb8e26eaea4b64"/>
+    <p:sldId xmlns:r="http://schemas.openxmlformats.org/officeDocument/2006/relationships" id="263" r:id="R62d7a6c5954c4372"/>
+    <p:sldId xmlns:r="http://schemas.openxmlformats.org/officeDocument/2006/relationships" id="264" r:id="R68dfddcc65e645df"/>
   </p:sldIdLst>
   <p:sldSz cx="12192000" cy="6858000"/>
   <p:notesSz cx="6858000" cy="9144000"/>
   <p:embeddedFontLst>
     <p:embeddedFont>
       <p:font typeface="JetBrains Mono"/>
-      <p:regular xmlns:r="http://schemas.openxmlformats.org/officeDocument/2006/relationships" r:id="R8432c98882244c04"/>
+      <p:regular xmlns:r="http://schemas.openxmlformats.org/officeDocument/2006/relationships" r:id="R30b4b0f32df24024"/>
     </p:embeddedFont>
   </p:embeddedFontLst>
 </p:presentation>
@@ -1071,7 +1071,7 @@
           <p:nvPr/>
         </p:nvPicPr>
         <p:blipFill rotWithShape="1">
-          <a:blip xmlns:r="http://schemas.openxmlformats.org/officeDocument/2006/relationships" xmlns:a="http://schemas.openxmlformats.org/drawingml/2006/main" r:embed="Rc7c76d5a57dd4216"/>
+          <a:blip xmlns:r="http://schemas.openxmlformats.org/officeDocument/2006/relationships" xmlns:a="http://schemas.openxmlformats.org/drawingml/2006/main" r:embed="Re871a7813c9a439d"/>
           <a:stretch xmlns:a="http://schemas.openxmlformats.org/drawingml/2006/main"/>
         </p:blipFill>
         <p:spPr>
@@ -1451,7 +1451,7 @@
           <p:nvPr/>
         </p:nvPicPr>
         <p:blipFill rotWithShape="1">
-          <a:blip xmlns:r="http://schemas.openxmlformats.org/officeDocument/2006/relationships" xmlns:a="http://schemas.openxmlformats.org/drawingml/2006/main" r:embed="R59592a4579d544d5">
+          <a:blip xmlns:r="http://schemas.openxmlformats.org/officeDocument/2006/relationships" xmlns:a="http://schemas.openxmlformats.org/drawingml/2006/main" r:embed="R9d03776c081d4f17">
             <a:alphaModFix amt="28000"/>
           </a:blip>
           <a:stretch xmlns:a="http://schemas.openxmlformats.org/drawingml/2006/main"/>
@@ -1664,7 +1664,7 @@
           <p:nvPr/>
         </p:nvPicPr>
         <p:blipFill rotWithShape="1">
-          <a:blip xmlns:r="http://schemas.openxmlformats.org/officeDocument/2006/relationships" xmlns:a="http://schemas.openxmlformats.org/drawingml/2006/main" r:embed="Rf0fa009c23c347ea">
+          <a:blip xmlns:r="http://schemas.openxmlformats.org/officeDocument/2006/relationships" xmlns:a="http://schemas.openxmlformats.org/drawingml/2006/main" r:embed="R0a4d993e6cc541c4">
             <a:alphaModFix amt="28000"/>
           </a:blip>
           <a:stretch xmlns:a="http://schemas.openxmlformats.org/drawingml/2006/main"/>
@@ -1899,7 +1899,7 @@
           <p:nvPr/>
         </p:nvPicPr>
         <p:blipFill rotWithShape="1">
-          <a:blip xmlns:r="http://schemas.openxmlformats.org/officeDocument/2006/relationships" xmlns:a="http://schemas.openxmlformats.org/drawingml/2006/main" r:embed="Rcf9c340c7dfd456d">
+          <a:blip xmlns:r="http://schemas.openxmlformats.org/officeDocument/2006/relationships" xmlns:a="http://schemas.openxmlformats.org/drawingml/2006/main" r:embed="Rf3ec9db111a04beb">
             <a:alphaModFix amt="28000"/>
           </a:blip>
           <a:stretch xmlns:a="http://schemas.openxmlformats.org/drawingml/2006/main"/>
@@ -2176,7 +2176,7 @@
           <p:nvPr/>
         </p:nvPicPr>
         <p:blipFill rotWithShape="1">
-          <a:blip xmlns:r="http://schemas.openxmlformats.org/officeDocument/2006/relationships" xmlns:a="http://schemas.openxmlformats.org/drawingml/2006/main" r:embed="Rcb6ab369114f4988">
+          <a:blip xmlns:r="http://schemas.openxmlformats.org/officeDocument/2006/relationships" xmlns:a="http://schemas.openxmlformats.org/drawingml/2006/main" r:embed="R2a53d7946cc94024">
             <a:alphaModFix amt="28000"/>
           </a:blip>
           <a:stretch xmlns:a="http://schemas.openxmlformats.org/drawingml/2006/main"/>
@@ -2451,7 +2451,7 @@
           <p:nvPr/>
         </p:nvPicPr>
         <p:blipFill rotWithShape="1">
-          <a:blip xmlns:r="http://schemas.openxmlformats.org/officeDocument/2006/relationships" xmlns:a="http://schemas.openxmlformats.org/drawingml/2006/main" r:embed="R38d7c12606f34476">
+          <a:blip xmlns:r="http://schemas.openxmlformats.org/officeDocument/2006/relationships" xmlns:a="http://schemas.openxmlformats.org/drawingml/2006/main" r:embed="R911312d505094bf2">
             <a:alphaModFix amt="28000"/>
           </a:blip>
           <a:stretch xmlns:a="http://schemas.openxmlformats.org/drawingml/2006/main"/>
@@ -2875,7 +2875,7 @@
           <p:nvPr/>
         </p:nvPicPr>
         <p:blipFill rotWithShape="1">
-          <a:blip xmlns:r="http://schemas.openxmlformats.org/officeDocument/2006/relationships" xmlns:a="http://schemas.openxmlformats.org/drawingml/2006/main" r:embed="Ra4eb4832c1dd4a01">
+          <a:blip xmlns:r="http://schemas.openxmlformats.org/officeDocument/2006/relationships" xmlns:a="http://schemas.openxmlformats.org/drawingml/2006/main" r:embed="R5e20f97fc4604a21">
             <a:alphaModFix amt="28000"/>
           </a:blip>
           <a:stretch xmlns:a="http://schemas.openxmlformats.org/drawingml/2006/main"/>
@@ -3016,7 +3016,7 @@
           <p:nvPr/>
         </p:nvPicPr>
         <p:blipFill rotWithShape="1">
-          <a:blip xmlns:r="http://schemas.openxmlformats.org/officeDocument/2006/relationships" xmlns:a="http://schemas.openxmlformats.org/drawingml/2006/main" r:embed="Rca5a5bb17c864bd4">
+          <a:blip xmlns:r="http://schemas.openxmlformats.org/officeDocument/2006/relationships" xmlns:a="http://schemas.openxmlformats.org/drawingml/2006/main" r:embed="R4480c86b11e34305">
             <a:alphaModFix amt="28000"/>
           </a:blip>
           <a:stretch xmlns:a="http://schemas.openxmlformats.org/drawingml/2006/main"/>
@@ -3130,7 +3130,7 @@
           <p:nvPr/>
         </p:nvPicPr>
         <p:blipFill rotWithShape="1">
-          <a:blip xmlns:r="http://schemas.openxmlformats.org/officeDocument/2006/relationships" xmlns:a="http://schemas.openxmlformats.org/drawingml/2006/main" r:embed="R0cc62261c4fa413a">
+          <a:blip xmlns:r="http://schemas.openxmlformats.org/officeDocument/2006/relationships" xmlns:a="http://schemas.openxmlformats.org/drawingml/2006/main" r:embed="Re37d2d79f954452e">
             <a:alphaModFix amt="28000"/>
           </a:blip>
           <a:stretch xmlns:a="http://schemas.openxmlformats.org/drawingml/2006/main"/>
@@ -3457,7 +3457,7 @@
           <p:nvPr/>
         </p:nvPicPr>
         <p:blipFill rotWithShape="1">
-          <a:blip xmlns:r="http://schemas.openxmlformats.org/officeDocument/2006/relationships" xmlns:a="http://schemas.openxmlformats.org/drawingml/2006/main" r:embed="R3583b3a2154f4585">
+          <a:blip xmlns:r="http://schemas.openxmlformats.org/officeDocument/2006/relationships" xmlns:a="http://schemas.openxmlformats.org/drawingml/2006/main" r:embed="R49dfd6bdd95f4a80">
             <a:alphaModFix amt="28000"/>
           </a:blip>
           <a:stretch xmlns:a="http://schemas.openxmlformats.org/drawingml/2006/main"/>
@@ -3745,7 +3745,7 @@
           <p:nvPr/>
         </p:nvPicPr>
         <p:blipFill rotWithShape="1">
-          <a:blip xmlns:r="http://schemas.openxmlformats.org/officeDocument/2006/relationships" xmlns:a="http://schemas.openxmlformats.org/drawingml/2006/main" r:embed="R07898680a2a848ba">
+          <a:blip xmlns:r="http://schemas.openxmlformats.org/officeDocument/2006/relationships" xmlns:a="http://schemas.openxmlformats.org/drawingml/2006/main" r:embed="R4494365a77244a66">
             <a:alphaModFix amt="28000"/>
           </a:blip>
           <a:stretch xmlns:a="http://schemas.openxmlformats.org/drawingml/2006/main"/>
@@ -3982,17 +3982,17 @@
   </p:cSld>
   <p:clrMap bg1="lt1" tx1="dk1" bg2="lt2" tx2="dk2" accent1="accent1" accent2="accent2" accent3="accent3" accent4="accent4" accent5="accent5" accent6="accent6" hlink="hlink" folHlink="folHlink"/>
   <p:sldLayoutIdLst>
-    <p:sldLayoutId xmlns:r="http://schemas.openxmlformats.org/officeDocument/2006/relationships" id="2147483649" r:id="R092f653d2c184255"/>
-    <p:sldLayoutId xmlns:r="http://schemas.openxmlformats.org/officeDocument/2006/relationships" id="2147483650" r:id="R7d4bb86e7b184184"/>
-    <p:sldLayoutId xmlns:r="http://schemas.openxmlformats.org/officeDocument/2006/relationships" id="2147483651" r:id="Rb356673bdabb4cd7"/>
-    <p:sldLayoutId xmlns:r="http://schemas.openxmlformats.org/officeDocument/2006/relationships" id="2147483652" r:id="R31b36b6f619f487e"/>
-    <p:sldLayoutId xmlns:r="http://schemas.openxmlformats.org/officeDocument/2006/relationships" id="2147483653" r:id="Rf4fd0dd6cbf44fc8"/>
-    <p:sldLayoutId xmlns:r="http://schemas.openxmlformats.org/officeDocument/2006/relationships" id="2147483654" r:id="Rc0ccbe0dc53a4706"/>
-    <p:sldLayoutId xmlns:r="http://schemas.openxmlformats.org/officeDocument/2006/relationships" id="2147483655" r:id="R6ab19fbcd1ef4ff2"/>
-    <p:sldLayoutId xmlns:r="http://schemas.openxmlformats.org/officeDocument/2006/relationships" id="2147483656" r:id="R9ffc207c1419420b"/>
-    <p:sldLayoutId xmlns:r="http://schemas.openxmlformats.org/officeDocument/2006/relationships" id="2147483657" r:id="Re569085160a34989"/>
-    <p:sldLayoutId xmlns:r="http://schemas.openxmlformats.org/officeDocument/2006/relationships" id="2147483658" r:id="Rf299254f29094f64"/>
-    <p:sldLayoutId xmlns:r="http://schemas.openxmlformats.org/officeDocument/2006/relationships" id="2147483659" r:id="Rd047d83793b4423c"/>
+    <p:sldLayoutId xmlns:r="http://schemas.openxmlformats.org/officeDocument/2006/relationships" id="2147483649" r:id="R42684e055bfe46ea"/>
+    <p:sldLayoutId xmlns:r="http://schemas.openxmlformats.org/officeDocument/2006/relationships" id="2147483650" r:id="R87f5e5ef52c64a0c"/>
+    <p:sldLayoutId xmlns:r="http://schemas.openxmlformats.org/officeDocument/2006/relationships" id="2147483651" r:id="R0060908cc1854934"/>
+    <p:sldLayoutId xmlns:r="http://schemas.openxmlformats.org/officeDocument/2006/relationships" id="2147483652" r:id="R8a50cb59515e47fc"/>
+    <p:sldLayoutId xmlns:r="http://schemas.openxmlformats.org/officeDocument/2006/relationships" id="2147483653" r:id="Rbb86c67f40e04999"/>
+    <p:sldLayoutId xmlns:r="http://schemas.openxmlformats.org/officeDocument/2006/relationships" id="2147483654" r:id="R551feea70c2f40fe"/>
+    <p:sldLayoutId xmlns:r="http://schemas.openxmlformats.org/officeDocument/2006/relationships" id="2147483655" r:id="R1228b85fa36e4d0f"/>
+    <p:sldLayoutId xmlns:r="http://schemas.openxmlformats.org/officeDocument/2006/relationships" id="2147483656" r:id="R63a040ceb76d497c"/>
+    <p:sldLayoutId xmlns:r="http://schemas.openxmlformats.org/officeDocument/2006/relationships" id="2147483657" r:id="R50bafa9645df4bff"/>
+    <p:sldLayoutId xmlns:r="http://schemas.openxmlformats.org/officeDocument/2006/relationships" id="2147483658" r:id="R9d9fdd9064044949"/>
+    <p:sldLayoutId xmlns:r="http://schemas.openxmlformats.org/officeDocument/2006/relationships" id="2147483659" r:id="R841a73603db14052"/>
   </p:sldLayoutIdLst>
   <p:hf hdr="0" ftr="0" dt="0"/>
   <p:txStyles>
@@ -4983,7 +4983,7 @@
             <a:r>
               <a:rPr sz="2400">
                 <a:solidFill>
-                  <a:srgbClr val="1750EB"/>
+                  <a:srgbClr val="C45E00"/>
                 </a:solidFill>
                 <a:latin typeface="JetBrains Mono"/>
                 <a:ea typeface="JetBrains Mono"/>
@@ -5098,7 +5098,7 @@
             <a:r>
               <a:rPr sz="2400">
                 <a:solidFill>
-                  <a:srgbClr val="1750EB"/>
+                  <a:srgbClr val="C45E00"/>
                 </a:solidFill>
                 <a:latin typeface="JetBrains Mono"/>
                 <a:ea typeface="JetBrains Mono"/>
@@ -5213,7 +5213,7 @@
             <a:r>
               <a:rPr sz="2400">
                 <a:solidFill>
-                  <a:srgbClr val="1750EB"/>
+                  <a:srgbClr val="C45E00"/>
                 </a:solidFill>
                 <a:latin typeface="JetBrains Mono"/>
                 <a:ea typeface="JetBrains Mono"/>
@@ -5668,7 +5668,7 @@
             <a:r>
               <a:rPr sz="2400">
                 <a:solidFill>
-                  <a:srgbClr val="1750EB"/>
+                  <a:srgbClr val="C45E00"/>
                 </a:solidFill>
                 <a:latin typeface="JetBrains Mono"/>
                 <a:ea typeface="JetBrains Mono"/>
@@ -5783,7 +5783,7 @@
             <a:r>
               <a:rPr sz="2400">
                 <a:solidFill>
-                  <a:srgbClr val="1750EB"/>
+                  <a:srgbClr val="C45E00"/>
                 </a:solidFill>
                 <a:latin typeface="JetBrains Mono"/>
                 <a:ea typeface="JetBrains Mono"/>
@@ -5898,7 +5898,7 @@
             <a:r>
               <a:rPr sz="2400">
                 <a:solidFill>
-                  <a:srgbClr val="1750EB"/>
+                  <a:srgbClr val="C45E00"/>
                 </a:solidFill>
                 <a:latin typeface="JetBrains Mono"/>
                 <a:ea typeface="JetBrains Mono"/>
@@ -6353,7 +6353,7 @@
             <a:r>
               <a:rPr sz="2400">
                 <a:solidFill>
-                  <a:srgbClr val="1750EB"/>
+                  <a:srgbClr val="C45E00"/>
                 </a:solidFill>
                 <a:latin typeface="JetBrains Mono"/>
                 <a:ea typeface="JetBrains Mono"/>
@@ -6468,7 +6468,7 @@
             <a:r>
               <a:rPr sz="2400">
                 <a:solidFill>
-                  <a:srgbClr val="1750EB"/>
+                  <a:srgbClr val="C45E00"/>
                 </a:solidFill>
                 <a:latin typeface="JetBrains Mono"/>
                 <a:ea typeface="JetBrains Mono"/>
@@ -6583,7 +6583,7 @@
             <a:r>
               <a:rPr sz="2400">
                 <a:solidFill>
-                  <a:srgbClr val="1750EB"/>
+                  <a:srgbClr val="C45E00"/>
                 </a:solidFill>
                 <a:latin typeface="JetBrains Mono"/>
                 <a:ea typeface="JetBrains Mono"/>
@@ -7291,7 +7291,7 @@
             <a:r>
               <a:rPr sz="1400">
                 <a:solidFill>
-                  <a:srgbClr val="1750EB"/>
+                  <a:srgbClr val="C45E00"/>
                 </a:solidFill>
                 <a:latin typeface="JetBrains Mono"/>
                 <a:ea typeface="JetBrains Mono"/>
@@ -7410,7 +7410,7 @@
             <a:r>
               <a:rPr sz="1400">
                 <a:solidFill>
-                  <a:srgbClr val="1750EB"/>
+                  <a:srgbClr val="C45E00"/>
                 </a:solidFill>
                 <a:latin typeface="JetBrains Mono"/>
                 <a:ea typeface="JetBrains Mono"/>
@@ -7529,7 +7529,7 @@
             <a:r>
               <a:rPr sz="1400">
                 <a:solidFill>
-                  <a:srgbClr val="1750EB"/>
+                  <a:srgbClr val="C45E00"/>
                 </a:solidFill>
                 <a:latin typeface="JetBrains Mono"/>
                 <a:ea typeface="JetBrains Mono"/>
@@ -8122,7 +8122,7 @@
             <a:r>
               <a:rPr sz="1400">
                 <a:solidFill>
-                  <a:srgbClr val="1750EB"/>
+                  <a:srgbClr val="C45E00"/>
                 </a:solidFill>
                 <a:latin typeface="JetBrains Mono"/>
                 <a:ea typeface="JetBrains Mono"/>
@@ -8241,7 +8241,7 @@
             <a:r>
               <a:rPr sz="1400">
                 <a:solidFill>
-                  <a:srgbClr val="1750EB"/>
+                  <a:srgbClr val="C45E00"/>
                 </a:solidFill>
                 <a:latin typeface="JetBrains Mono"/>
                 <a:ea typeface="JetBrains Mono"/>
@@ -8360,7 +8360,7 @@
             <a:r>
               <a:rPr sz="1400">
                 <a:solidFill>
-                  <a:srgbClr val="1750EB"/>
+                  <a:srgbClr val="C45E00"/>
                 </a:solidFill>
                 <a:latin typeface="JetBrains Mono"/>
                 <a:ea typeface="JetBrains Mono"/>
@@ -8551,7 +8551,7 @@
             <a:r>
               <a:rPr sz="2050" b="0">
                 <a:solidFill>
-                  <a:srgbClr val="1750EB"/>
+                  <a:srgbClr val="C45E00"/>
                 </a:solidFill>
                 <a:latin typeface="JetBrains Mono"/>
                 <a:ea typeface="JetBrains Mono"/>
@@ -8595,7 +8595,7 @@
             <a:r>
               <a:rPr sz="2050" b="0">
                 <a:solidFill>
-                  <a:srgbClr val="1750EB"/>
+                  <a:srgbClr val="C45E00"/>
                 </a:solidFill>
                 <a:latin typeface="JetBrains Mono"/>
                 <a:ea typeface="JetBrains Mono"/>
@@ -9041,7 +9041,7 @@
             <a:r>
               <a:rPr sz="1400">
                 <a:solidFill>
-                  <a:srgbClr val="1750EB"/>
+                  <a:srgbClr val="C45E00"/>
                 </a:solidFill>
                 <a:latin typeface="JetBrains Mono"/>
                 <a:ea typeface="JetBrains Mono"/>
@@ -9160,7 +9160,7 @@
             <a:r>
               <a:rPr sz="1400">
                 <a:solidFill>
-                  <a:srgbClr val="1750EB"/>
+                  <a:srgbClr val="C45E00"/>
                 </a:solidFill>
                 <a:latin typeface="JetBrains Mono"/>
                 <a:ea typeface="JetBrains Mono"/>
@@ -9279,7 +9279,7 @@
             <a:r>
               <a:rPr sz="1400">
                 <a:solidFill>
-                  <a:srgbClr val="1750EB"/>
+                  <a:srgbClr val="C45E00"/>
                 </a:solidFill>
                 <a:latin typeface="JetBrains Mono"/>
                 <a:ea typeface="JetBrains Mono"/>
@@ -9470,7 +9470,7 @@
             <a:r>
               <a:rPr sz="2050" b="0">
                 <a:solidFill>
-                  <a:srgbClr val="1750EB"/>
+                  <a:srgbClr val="C45E00"/>
                 </a:solidFill>
                 <a:latin typeface="JetBrains Mono"/>
                 <a:ea typeface="JetBrains Mono"/>
@@ -9492,7 +9492,7 @@
             <a:r>
               <a:rPr sz="2050" b="0">
                 <a:solidFill>
-                  <a:srgbClr val="1750EB"/>
+                  <a:srgbClr val="C45E00"/>
                 </a:solidFill>
                 <a:latin typeface="JetBrains Mono"/>
                 <a:ea typeface="JetBrains Mono"/>
@@ -9514,7 +9514,7 @@
             <a:r>
               <a:rPr sz="2050" b="0">
                 <a:solidFill>
-                  <a:srgbClr val="1750EB"/>
+                  <a:srgbClr val="C45E00"/>
                 </a:solidFill>
                 <a:latin typeface="JetBrains Mono"/>
                 <a:ea typeface="JetBrains Mono"/>
@@ -9624,7 +9624,7 @@
             <a:r>
               <a:rPr sz="2050" b="0">
                 <a:solidFill>
-                  <a:srgbClr val="1750EB"/>
+                  <a:srgbClr val="C45E00"/>
                 </a:solidFill>
                 <a:latin typeface="JetBrains Mono"/>
                 <a:ea typeface="JetBrains Mono"/>
@@ -10004,7 +10004,7 @@
             <a:r>
               <a:rPr sz="1400">
                 <a:solidFill>
-                  <a:srgbClr val="1750EB"/>
+                  <a:srgbClr val="C45E00"/>
                 </a:solidFill>
                 <a:latin typeface="JetBrains Mono"/>
                 <a:ea typeface="JetBrains Mono"/>
@@ -10123,7 +10123,7 @@
             <a:r>
               <a:rPr sz="1400">
                 <a:solidFill>
-                  <a:srgbClr val="1750EB"/>
+                  <a:srgbClr val="C45E00"/>
                 </a:solidFill>
                 <a:latin typeface="JetBrains Mono"/>
                 <a:ea typeface="JetBrains Mono"/>
@@ -10242,7 +10242,7 @@
             <a:r>
               <a:rPr sz="1400">
                 <a:solidFill>
-                  <a:srgbClr val="1750EB"/>
+                  <a:srgbClr val="C45E00"/>
                 </a:solidFill>
                 <a:latin typeface="JetBrains Mono"/>
                 <a:ea typeface="JetBrains Mono"/>
@@ -10547,7 +10547,7 @@
             <a:r>
               <a:rPr sz="1800">
                 <a:solidFill>
-                  <a:srgbClr val="1750EB"/>
+                  <a:srgbClr val="C45E00"/>
                 </a:solidFill>
                 <a:latin typeface="JetBrains Mono"/>
                 <a:ea typeface="JetBrains Mono"/>
@@ -10662,7 +10662,7 @@
             <a:r>
               <a:rPr sz="1800">
                 <a:solidFill>
-                  <a:srgbClr val="1750EB"/>
+                  <a:srgbClr val="C45E00"/>
                 </a:solidFill>
                 <a:latin typeface="JetBrains Mono"/>
                 <a:ea typeface="JetBrains Mono"/>
@@ -10777,7 +10777,7 @@
             <a:r>
               <a:rPr sz="1800">
                 <a:solidFill>
-                  <a:srgbClr val="1750EB"/>
+                  <a:srgbClr val="C45E00"/>
                 </a:solidFill>
                 <a:latin typeface="JetBrains Mono"/>
                 <a:ea typeface="JetBrains Mono"/>

--- a/Mapped Curriculum Lessons/Grade 6/Lesson 05 - More Decisions/More Decisions - Slides.pptx
+++ b/Mapped Curriculum Lessons/Grade 6/Lesson 05 - More Decisions/More Decisions - Slides.pptx
@@ -2,28 +2,28 @@
 <file path=ppt/presentation.xml><?xml version="1.0" encoding="utf-8"?>
 <p:presentation xmlns:p="http://schemas.openxmlformats.org/presentationml/2006/main" embedTrueTypeFonts="1" saveSubsetFonts="0">
   <p:sldMasterIdLst>
-    <p:sldMasterId xmlns:r="http://schemas.openxmlformats.org/officeDocument/2006/relationships" id="2147483648" r:id="Rc610bc347ea94c91"/>
+    <p:sldMasterId xmlns:r="http://schemas.openxmlformats.org/officeDocument/2006/relationships" id="2147483648" r:id="R87506547f2f04aee"/>
   </p:sldMasterIdLst>
   <p:notesMasterIdLst>
-    <p:notesMasterId xmlns:r="http://schemas.openxmlformats.org/officeDocument/2006/relationships" r:id="R08f9daa72577496f"/>
+    <p:notesMasterId xmlns:r="http://schemas.openxmlformats.org/officeDocument/2006/relationships" r:id="R4315ff9b8bce415a"/>
   </p:notesMasterIdLst>
   <p:sldIdLst>
-    <p:sldId xmlns:r="http://schemas.openxmlformats.org/officeDocument/2006/relationships" id="256" r:id="R6e84a3f425ea45d1"/>
-    <p:sldId xmlns:r="http://schemas.openxmlformats.org/officeDocument/2006/relationships" id="257" r:id="R6c4e2c87fc81490d"/>
-    <p:sldId xmlns:r="http://schemas.openxmlformats.org/officeDocument/2006/relationships" id="258" r:id="R12146313d9894ddd"/>
-    <p:sldId xmlns:r="http://schemas.openxmlformats.org/officeDocument/2006/relationships" id="259" r:id="Rdecd5f46a0694dcd"/>
-    <p:sldId xmlns:r="http://schemas.openxmlformats.org/officeDocument/2006/relationships" id="260" r:id="R7ff33b49ecca4274"/>
-    <p:sldId xmlns:r="http://schemas.openxmlformats.org/officeDocument/2006/relationships" id="261" r:id="R57d9884530dd4207"/>
-    <p:sldId xmlns:r="http://schemas.openxmlformats.org/officeDocument/2006/relationships" id="262" r:id="R19cb8e26eaea4b64"/>
-    <p:sldId xmlns:r="http://schemas.openxmlformats.org/officeDocument/2006/relationships" id="263" r:id="R62d7a6c5954c4372"/>
-    <p:sldId xmlns:r="http://schemas.openxmlformats.org/officeDocument/2006/relationships" id="264" r:id="R68dfddcc65e645df"/>
+    <p:sldId xmlns:r="http://schemas.openxmlformats.org/officeDocument/2006/relationships" id="256" r:id="R3ff9cf1274f244f2"/>
+    <p:sldId xmlns:r="http://schemas.openxmlformats.org/officeDocument/2006/relationships" id="257" r:id="R7e4a6de7a1bf4332"/>
+    <p:sldId xmlns:r="http://schemas.openxmlformats.org/officeDocument/2006/relationships" id="258" r:id="Rf7efd2c191654f45"/>
+    <p:sldId xmlns:r="http://schemas.openxmlformats.org/officeDocument/2006/relationships" id="259" r:id="Re18a39717ad4406b"/>
+    <p:sldId xmlns:r="http://schemas.openxmlformats.org/officeDocument/2006/relationships" id="260" r:id="R4aa45ca863ce4a8f"/>
+    <p:sldId xmlns:r="http://schemas.openxmlformats.org/officeDocument/2006/relationships" id="261" r:id="R79c805fd46d348e6"/>
+    <p:sldId xmlns:r="http://schemas.openxmlformats.org/officeDocument/2006/relationships" id="262" r:id="R280d131728c34963"/>
+    <p:sldId xmlns:r="http://schemas.openxmlformats.org/officeDocument/2006/relationships" id="263" r:id="R1deb497e5d1045fd"/>
+    <p:sldId xmlns:r="http://schemas.openxmlformats.org/officeDocument/2006/relationships" id="264" r:id="R0036044a6ab740c0"/>
   </p:sldIdLst>
   <p:sldSz cx="12192000" cy="6858000"/>
   <p:notesSz cx="6858000" cy="9144000"/>
   <p:embeddedFontLst>
     <p:embeddedFont>
       <p:font typeface="JetBrains Mono"/>
-      <p:regular xmlns:r="http://schemas.openxmlformats.org/officeDocument/2006/relationships" r:id="R30b4b0f32df24024"/>
+      <p:regular xmlns:r="http://schemas.openxmlformats.org/officeDocument/2006/relationships" r:id="Rd1b9f97f32f548ab"/>
     </p:embeddedFont>
   </p:embeddedFontLst>
 </p:presentation>
@@ -1071,7 +1071,7 @@
           <p:nvPr/>
         </p:nvPicPr>
         <p:blipFill rotWithShape="1">
-          <a:blip xmlns:r="http://schemas.openxmlformats.org/officeDocument/2006/relationships" xmlns:a="http://schemas.openxmlformats.org/drawingml/2006/main" r:embed="Re871a7813c9a439d"/>
+          <a:blip xmlns:r="http://schemas.openxmlformats.org/officeDocument/2006/relationships" xmlns:a="http://schemas.openxmlformats.org/drawingml/2006/main" r:embed="Rb59a4a38038e4ab8"/>
           <a:stretch xmlns:a="http://schemas.openxmlformats.org/drawingml/2006/main"/>
         </p:blipFill>
         <p:spPr>
@@ -1451,7 +1451,7 @@
           <p:nvPr/>
         </p:nvPicPr>
         <p:blipFill rotWithShape="1">
-          <a:blip xmlns:r="http://schemas.openxmlformats.org/officeDocument/2006/relationships" xmlns:a="http://schemas.openxmlformats.org/drawingml/2006/main" r:embed="R9d03776c081d4f17">
+          <a:blip xmlns:r="http://schemas.openxmlformats.org/officeDocument/2006/relationships" xmlns:a="http://schemas.openxmlformats.org/drawingml/2006/main" r:embed="Rf1a99a6cfddb4808">
             <a:alphaModFix amt="28000"/>
           </a:blip>
           <a:stretch xmlns:a="http://schemas.openxmlformats.org/drawingml/2006/main"/>
@@ -1664,7 +1664,7 @@
           <p:nvPr/>
         </p:nvPicPr>
         <p:blipFill rotWithShape="1">
-          <a:blip xmlns:r="http://schemas.openxmlformats.org/officeDocument/2006/relationships" xmlns:a="http://schemas.openxmlformats.org/drawingml/2006/main" r:embed="R0a4d993e6cc541c4">
+          <a:blip xmlns:r="http://schemas.openxmlformats.org/officeDocument/2006/relationships" xmlns:a="http://schemas.openxmlformats.org/drawingml/2006/main" r:embed="Rde1ebf38121f4956">
             <a:alphaModFix amt="28000"/>
           </a:blip>
           <a:stretch xmlns:a="http://schemas.openxmlformats.org/drawingml/2006/main"/>
@@ -1899,7 +1899,7 @@
           <p:nvPr/>
         </p:nvPicPr>
         <p:blipFill rotWithShape="1">
-          <a:blip xmlns:r="http://schemas.openxmlformats.org/officeDocument/2006/relationships" xmlns:a="http://schemas.openxmlformats.org/drawingml/2006/main" r:embed="Rf3ec9db111a04beb">
+          <a:blip xmlns:r="http://schemas.openxmlformats.org/officeDocument/2006/relationships" xmlns:a="http://schemas.openxmlformats.org/drawingml/2006/main" r:embed="Rc5c8bf2ad291410e">
             <a:alphaModFix amt="28000"/>
           </a:blip>
           <a:stretch xmlns:a="http://schemas.openxmlformats.org/drawingml/2006/main"/>
@@ -2176,7 +2176,7 @@
           <p:nvPr/>
         </p:nvPicPr>
         <p:blipFill rotWithShape="1">
-          <a:blip xmlns:r="http://schemas.openxmlformats.org/officeDocument/2006/relationships" xmlns:a="http://schemas.openxmlformats.org/drawingml/2006/main" r:embed="R2a53d7946cc94024">
+          <a:blip xmlns:r="http://schemas.openxmlformats.org/officeDocument/2006/relationships" xmlns:a="http://schemas.openxmlformats.org/drawingml/2006/main" r:embed="R498fab5f5631421d">
             <a:alphaModFix amt="28000"/>
           </a:blip>
           <a:stretch xmlns:a="http://schemas.openxmlformats.org/drawingml/2006/main"/>
@@ -2451,7 +2451,7 @@
           <p:nvPr/>
         </p:nvPicPr>
         <p:blipFill rotWithShape="1">
-          <a:blip xmlns:r="http://schemas.openxmlformats.org/officeDocument/2006/relationships" xmlns:a="http://schemas.openxmlformats.org/drawingml/2006/main" r:embed="R911312d505094bf2">
+          <a:blip xmlns:r="http://schemas.openxmlformats.org/officeDocument/2006/relationships" xmlns:a="http://schemas.openxmlformats.org/drawingml/2006/main" r:embed="Re61fb0c558c84276">
             <a:alphaModFix amt="28000"/>
           </a:blip>
           <a:stretch xmlns:a="http://schemas.openxmlformats.org/drawingml/2006/main"/>
@@ -2875,7 +2875,7 @@
           <p:nvPr/>
         </p:nvPicPr>
         <p:blipFill rotWithShape="1">
-          <a:blip xmlns:r="http://schemas.openxmlformats.org/officeDocument/2006/relationships" xmlns:a="http://schemas.openxmlformats.org/drawingml/2006/main" r:embed="R5e20f97fc4604a21">
+          <a:blip xmlns:r="http://schemas.openxmlformats.org/officeDocument/2006/relationships" xmlns:a="http://schemas.openxmlformats.org/drawingml/2006/main" r:embed="Rbb814d6179394f0a">
             <a:alphaModFix amt="28000"/>
           </a:blip>
           <a:stretch xmlns:a="http://schemas.openxmlformats.org/drawingml/2006/main"/>
@@ -3016,7 +3016,7 @@
           <p:nvPr/>
         </p:nvPicPr>
         <p:blipFill rotWithShape="1">
-          <a:blip xmlns:r="http://schemas.openxmlformats.org/officeDocument/2006/relationships" xmlns:a="http://schemas.openxmlformats.org/drawingml/2006/main" r:embed="R4480c86b11e34305">
+          <a:blip xmlns:r="http://schemas.openxmlformats.org/officeDocument/2006/relationships" xmlns:a="http://schemas.openxmlformats.org/drawingml/2006/main" r:embed="Re95a2541cdf940d8">
             <a:alphaModFix amt="28000"/>
           </a:blip>
           <a:stretch xmlns:a="http://schemas.openxmlformats.org/drawingml/2006/main"/>
@@ -3130,7 +3130,7 @@
           <p:nvPr/>
         </p:nvPicPr>
         <p:blipFill rotWithShape="1">
-          <a:blip xmlns:r="http://schemas.openxmlformats.org/officeDocument/2006/relationships" xmlns:a="http://schemas.openxmlformats.org/drawingml/2006/main" r:embed="Re37d2d79f954452e">
+          <a:blip xmlns:r="http://schemas.openxmlformats.org/officeDocument/2006/relationships" xmlns:a="http://schemas.openxmlformats.org/drawingml/2006/main" r:embed="Raa7c0b354edf4a5e">
             <a:alphaModFix amt="28000"/>
           </a:blip>
           <a:stretch xmlns:a="http://schemas.openxmlformats.org/drawingml/2006/main"/>
@@ -3457,7 +3457,7 @@
           <p:nvPr/>
         </p:nvPicPr>
         <p:blipFill rotWithShape="1">
-          <a:blip xmlns:r="http://schemas.openxmlformats.org/officeDocument/2006/relationships" xmlns:a="http://schemas.openxmlformats.org/drawingml/2006/main" r:embed="R49dfd6bdd95f4a80">
+          <a:blip xmlns:r="http://schemas.openxmlformats.org/officeDocument/2006/relationships" xmlns:a="http://schemas.openxmlformats.org/drawingml/2006/main" r:embed="R7c3e9e374db143d7">
             <a:alphaModFix amt="28000"/>
           </a:blip>
           <a:stretch xmlns:a="http://schemas.openxmlformats.org/drawingml/2006/main"/>
@@ -3745,7 +3745,7 @@
           <p:nvPr/>
         </p:nvPicPr>
         <p:blipFill rotWithShape="1">
-          <a:blip xmlns:r="http://schemas.openxmlformats.org/officeDocument/2006/relationships" xmlns:a="http://schemas.openxmlformats.org/drawingml/2006/main" r:embed="R4494365a77244a66">
+          <a:blip xmlns:r="http://schemas.openxmlformats.org/officeDocument/2006/relationships" xmlns:a="http://schemas.openxmlformats.org/drawingml/2006/main" r:embed="Rcac16e9eaba44fff">
             <a:alphaModFix amt="28000"/>
           </a:blip>
           <a:stretch xmlns:a="http://schemas.openxmlformats.org/drawingml/2006/main"/>
@@ -3982,17 +3982,17 @@
   </p:cSld>
   <p:clrMap bg1="lt1" tx1="dk1" bg2="lt2" tx2="dk2" accent1="accent1" accent2="accent2" accent3="accent3" accent4="accent4" accent5="accent5" accent6="accent6" hlink="hlink" folHlink="folHlink"/>
   <p:sldLayoutIdLst>
-    <p:sldLayoutId xmlns:r="http://schemas.openxmlformats.org/officeDocument/2006/relationships" id="2147483649" r:id="R42684e055bfe46ea"/>
-    <p:sldLayoutId xmlns:r="http://schemas.openxmlformats.org/officeDocument/2006/relationships" id="2147483650" r:id="R87f5e5ef52c64a0c"/>
-    <p:sldLayoutId xmlns:r="http://schemas.openxmlformats.org/officeDocument/2006/relationships" id="2147483651" r:id="R0060908cc1854934"/>
-    <p:sldLayoutId xmlns:r="http://schemas.openxmlformats.org/officeDocument/2006/relationships" id="2147483652" r:id="R8a50cb59515e47fc"/>
-    <p:sldLayoutId xmlns:r="http://schemas.openxmlformats.org/officeDocument/2006/relationships" id="2147483653" r:id="Rbb86c67f40e04999"/>
-    <p:sldLayoutId xmlns:r="http://schemas.openxmlformats.org/officeDocument/2006/relationships" id="2147483654" r:id="R551feea70c2f40fe"/>
-    <p:sldLayoutId xmlns:r="http://schemas.openxmlformats.org/officeDocument/2006/relationships" id="2147483655" r:id="R1228b85fa36e4d0f"/>
-    <p:sldLayoutId xmlns:r="http://schemas.openxmlformats.org/officeDocument/2006/relationships" id="2147483656" r:id="R63a040ceb76d497c"/>
-    <p:sldLayoutId xmlns:r="http://schemas.openxmlformats.org/officeDocument/2006/relationships" id="2147483657" r:id="R50bafa9645df4bff"/>
-    <p:sldLayoutId xmlns:r="http://schemas.openxmlformats.org/officeDocument/2006/relationships" id="2147483658" r:id="R9d9fdd9064044949"/>
-    <p:sldLayoutId xmlns:r="http://schemas.openxmlformats.org/officeDocument/2006/relationships" id="2147483659" r:id="R841a73603db14052"/>
+    <p:sldLayoutId xmlns:r="http://schemas.openxmlformats.org/officeDocument/2006/relationships" id="2147483649" r:id="R784a67ccf92d4698"/>
+    <p:sldLayoutId xmlns:r="http://schemas.openxmlformats.org/officeDocument/2006/relationships" id="2147483650" r:id="R5b5b75db171241e9"/>
+    <p:sldLayoutId xmlns:r="http://schemas.openxmlformats.org/officeDocument/2006/relationships" id="2147483651" r:id="R7ca1207844d649ac"/>
+    <p:sldLayoutId xmlns:r="http://schemas.openxmlformats.org/officeDocument/2006/relationships" id="2147483652" r:id="Re029360a24384e78"/>
+    <p:sldLayoutId xmlns:r="http://schemas.openxmlformats.org/officeDocument/2006/relationships" id="2147483653" r:id="Re0133d93da0f44ef"/>
+    <p:sldLayoutId xmlns:r="http://schemas.openxmlformats.org/officeDocument/2006/relationships" id="2147483654" r:id="R0f86667618904be8"/>
+    <p:sldLayoutId xmlns:r="http://schemas.openxmlformats.org/officeDocument/2006/relationships" id="2147483655" r:id="R9d5745bf3dc440e2"/>
+    <p:sldLayoutId xmlns:r="http://schemas.openxmlformats.org/officeDocument/2006/relationships" id="2147483656" r:id="Rbc54e8523ace4b66"/>
+    <p:sldLayoutId xmlns:r="http://schemas.openxmlformats.org/officeDocument/2006/relationships" id="2147483657" r:id="Rf21c2da487174ba0"/>
+    <p:sldLayoutId xmlns:r="http://schemas.openxmlformats.org/officeDocument/2006/relationships" id="2147483658" r:id="R722391f1d94749b4"/>
+    <p:sldLayoutId xmlns:r="http://schemas.openxmlformats.org/officeDocument/2006/relationships" id="2147483659" r:id="Rf44f203fd0344d5a"/>
   </p:sldLayoutIdLst>
   <p:hf hdr="0" ftr="0" dt="0"/>
   <p:txStyles>
@@ -9619,29 +9619,7 @@
                 <a:ea typeface="Calibri"/>
                 <a:cs typeface="Calibri"/>
               </a:rPr>
-              <a:t> for anything </a:t>
-            </a:r>
-            <a:r>
-              <a:rPr sz="2050" b="0">
-                <a:solidFill>
-                  <a:srgbClr val="C45E00"/>
-                </a:solidFill>
-                <a:latin typeface="JetBrains Mono"/>
-                <a:ea typeface="JetBrains Mono"/>
-                <a:cs typeface="JetBrains Mono"/>
-              </a:rPr>
-              <a:t>else</a:t>
-            </a:r>
-            <a:r>
-              <a:rPr sz="2400" b="0">
-                <a:solidFill>
-                  <a:srgbClr val="080808"/>
-                </a:solidFill>
-                <a:latin typeface="Calibri"/>
-                <a:ea typeface="Calibri"/>
-                <a:cs typeface="Calibri"/>
-              </a:rPr>
-              <a:t>. Test 30, 20, 5 and -3.</a:t>
+              <a:t> for anything else. Test 30, 20, 5 and -3.</a:t>
             </a:r>
           </a:p>
         </p:txBody>

--- a/Mapped Curriculum Lessons/Grade 6/Lesson 05 - More Decisions/More Decisions - Slides.pptx
+++ b/Mapped Curriculum Lessons/Grade 6/Lesson 05 - More Decisions/More Decisions - Slides.pptx
@@ -2,28 +2,28 @@
 <file path=ppt/presentation.xml><?xml version="1.0" encoding="utf-8"?>
 <p:presentation xmlns:p="http://schemas.openxmlformats.org/presentationml/2006/main" embedTrueTypeFonts="1" saveSubsetFonts="0">
   <p:sldMasterIdLst>
-    <p:sldMasterId xmlns:r="http://schemas.openxmlformats.org/officeDocument/2006/relationships" id="2147483648" r:id="R87506547f2f04aee"/>
+    <p:sldMasterId xmlns:r="http://schemas.openxmlformats.org/officeDocument/2006/relationships" id="2147483648" r:id="R009a3b4f1cdb47ad"/>
   </p:sldMasterIdLst>
   <p:notesMasterIdLst>
-    <p:notesMasterId xmlns:r="http://schemas.openxmlformats.org/officeDocument/2006/relationships" r:id="R4315ff9b8bce415a"/>
+    <p:notesMasterId xmlns:r="http://schemas.openxmlformats.org/officeDocument/2006/relationships" r:id="R420e3245e84144b7"/>
   </p:notesMasterIdLst>
   <p:sldIdLst>
-    <p:sldId xmlns:r="http://schemas.openxmlformats.org/officeDocument/2006/relationships" id="256" r:id="R3ff9cf1274f244f2"/>
-    <p:sldId xmlns:r="http://schemas.openxmlformats.org/officeDocument/2006/relationships" id="257" r:id="R7e4a6de7a1bf4332"/>
-    <p:sldId xmlns:r="http://schemas.openxmlformats.org/officeDocument/2006/relationships" id="258" r:id="Rf7efd2c191654f45"/>
-    <p:sldId xmlns:r="http://schemas.openxmlformats.org/officeDocument/2006/relationships" id="259" r:id="Re18a39717ad4406b"/>
-    <p:sldId xmlns:r="http://schemas.openxmlformats.org/officeDocument/2006/relationships" id="260" r:id="R4aa45ca863ce4a8f"/>
-    <p:sldId xmlns:r="http://schemas.openxmlformats.org/officeDocument/2006/relationships" id="261" r:id="R79c805fd46d348e6"/>
-    <p:sldId xmlns:r="http://schemas.openxmlformats.org/officeDocument/2006/relationships" id="262" r:id="R280d131728c34963"/>
-    <p:sldId xmlns:r="http://schemas.openxmlformats.org/officeDocument/2006/relationships" id="263" r:id="R1deb497e5d1045fd"/>
-    <p:sldId xmlns:r="http://schemas.openxmlformats.org/officeDocument/2006/relationships" id="264" r:id="R0036044a6ab740c0"/>
+    <p:sldId xmlns:r="http://schemas.openxmlformats.org/officeDocument/2006/relationships" id="256" r:id="Reb89eda700e0417d"/>
+    <p:sldId xmlns:r="http://schemas.openxmlformats.org/officeDocument/2006/relationships" id="257" r:id="Re4d1d067e47e40e4"/>
+    <p:sldId xmlns:r="http://schemas.openxmlformats.org/officeDocument/2006/relationships" id="258" r:id="Rdb79bb79084749ad"/>
+    <p:sldId xmlns:r="http://schemas.openxmlformats.org/officeDocument/2006/relationships" id="259" r:id="R6b272a5176e644b5"/>
+    <p:sldId xmlns:r="http://schemas.openxmlformats.org/officeDocument/2006/relationships" id="260" r:id="R42dcb7bd058a4d8e"/>
+    <p:sldId xmlns:r="http://schemas.openxmlformats.org/officeDocument/2006/relationships" id="261" r:id="R31569cb14e034538"/>
+    <p:sldId xmlns:r="http://schemas.openxmlformats.org/officeDocument/2006/relationships" id="262" r:id="R19c3584ca3294c55"/>
+    <p:sldId xmlns:r="http://schemas.openxmlformats.org/officeDocument/2006/relationships" id="263" r:id="Rbf7ea83066a144b0"/>
+    <p:sldId xmlns:r="http://schemas.openxmlformats.org/officeDocument/2006/relationships" id="264" r:id="R63ee18d94b3e41a8"/>
   </p:sldIdLst>
   <p:sldSz cx="12192000" cy="6858000"/>
   <p:notesSz cx="6858000" cy="9144000"/>
   <p:embeddedFontLst>
     <p:embeddedFont>
       <p:font typeface="JetBrains Mono"/>
-      <p:regular xmlns:r="http://schemas.openxmlformats.org/officeDocument/2006/relationships" r:id="Rd1b9f97f32f548ab"/>
+      <p:regular xmlns:r="http://schemas.openxmlformats.org/officeDocument/2006/relationships" r:id="R0ce518c6fd674c0b"/>
     </p:embeddedFont>
   </p:embeddedFontLst>
 </p:presentation>
@@ -1071,7 +1071,7 @@
           <p:nvPr/>
         </p:nvPicPr>
         <p:blipFill rotWithShape="1">
-          <a:blip xmlns:r="http://schemas.openxmlformats.org/officeDocument/2006/relationships" xmlns:a="http://schemas.openxmlformats.org/drawingml/2006/main" r:embed="Rb59a4a38038e4ab8"/>
+          <a:blip xmlns:r="http://schemas.openxmlformats.org/officeDocument/2006/relationships" xmlns:a="http://schemas.openxmlformats.org/drawingml/2006/main" r:embed="R1678029176f5424f"/>
           <a:stretch xmlns:a="http://schemas.openxmlformats.org/drawingml/2006/main"/>
         </p:blipFill>
         <p:spPr>
@@ -1451,7 +1451,7 @@
           <p:nvPr/>
         </p:nvPicPr>
         <p:blipFill rotWithShape="1">
-          <a:blip xmlns:r="http://schemas.openxmlformats.org/officeDocument/2006/relationships" xmlns:a="http://schemas.openxmlformats.org/drawingml/2006/main" r:embed="Rf1a99a6cfddb4808">
+          <a:blip xmlns:r="http://schemas.openxmlformats.org/officeDocument/2006/relationships" xmlns:a="http://schemas.openxmlformats.org/drawingml/2006/main" r:embed="R468d3521bcbd4df5">
             <a:alphaModFix amt="28000"/>
           </a:blip>
           <a:stretch xmlns:a="http://schemas.openxmlformats.org/drawingml/2006/main"/>
@@ -1664,7 +1664,7 @@
           <p:nvPr/>
         </p:nvPicPr>
         <p:blipFill rotWithShape="1">
-          <a:blip xmlns:r="http://schemas.openxmlformats.org/officeDocument/2006/relationships" xmlns:a="http://schemas.openxmlformats.org/drawingml/2006/main" r:embed="Rde1ebf38121f4956">
+          <a:blip xmlns:r="http://schemas.openxmlformats.org/officeDocument/2006/relationships" xmlns:a="http://schemas.openxmlformats.org/drawingml/2006/main" r:embed="R2c2df04445454c89">
             <a:alphaModFix amt="28000"/>
           </a:blip>
           <a:stretch xmlns:a="http://schemas.openxmlformats.org/drawingml/2006/main"/>
@@ -1899,7 +1899,7 @@
           <p:nvPr/>
         </p:nvPicPr>
         <p:blipFill rotWithShape="1">
-          <a:blip xmlns:r="http://schemas.openxmlformats.org/officeDocument/2006/relationships" xmlns:a="http://schemas.openxmlformats.org/drawingml/2006/main" r:embed="Rc5c8bf2ad291410e">
+          <a:blip xmlns:r="http://schemas.openxmlformats.org/officeDocument/2006/relationships" xmlns:a="http://schemas.openxmlformats.org/drawingml/2006/main" r:embed="Rad367a57e4c34aae">
             <a:alphaModFix amt="28000"/>
           </a:blip>
           <a:stretch xmlns:a="http://schemas.openxmlformats.org/drawingml/2006/main"/>
@@ -2176,7 +2176,7 @@
           <p:nvPr/>
         </p:nvPicPr>
         <p:blipFill rotWithShape="1">
-          <a:blip xmlns:r="http://schemas.openxmlformats.org/officeDocument/2006/relationships" xmlns:a="http://schemas.openxmlformats.org/drawingml/2006/main" r:embed="R498fab5f5631421d">
+          <a:blip xmlns:r="http://schemas.openxmlformats.org/officeDocument/2006/relationships" xmlns:a="http://schemas.openxmlformats.org/drawingml/2006/main" r:embed="R6733eac087a64698">
             <a:alphaModFix amt="28000"/>
           </a:blip>
           <a:stretch xmlns:a="http://schemas.openxmlformats.org/drawingml/2006/main"/>
@@ -2451,7 +2451,7 @@
           <p:nvPr/>
         </p:nvPicPr>
         <p:blipFill rotWithShape="1">
-          <a:blip xmlns:r="http://schemas.openxmlformats.org/officeDocument/2006/relationships" xmlns:a="http://schemas.openxmlformats.org/drawingml/2006/main" r:embed="Re61fb0c558c84276">
+          <a:blip xmlns:r="http://schemas.openxmlformats.org/officeDocument/2006/relationships" xmlns:a="http://schemas.openxmlformats.org/drawingml/2006/main" r:embed="R7e4e6a6c96a54eed">
             <a:alphaModFix amt="28000"/>
           </a:blip>
           <a:stretch xmlns:a="http://schemas.openxmlformats.org/drawingml/2006/main"/>
@@ -2875,7 +2875,7 @@
           <p:nvPr/>
         </p:nvPicPr>
         <p:blipFill rotWithShape="1">
-          <a:blip xmlns:r="http://schemas.openxmlformats.org/officeDocument/2006/relationships" xmlns:a="http://schemas.openxmlformats.org/drawingml/2006/main" r:embed="Rbb814d6179394f0a">
+          <a:blip xmlns:r="http://schemas.openxmlformats.org/officeDocument/2006/relationships" xmlns:a="http://schemas.openxmlformats.org/drawingml/2006/main" r:embed="R1c79f338be6f49ff">
             <a:alphaModFix amt="28000"/>
           </a:blip>
           <a:stretch xmlns:a="http://schemas.openxmlformats.org/drawingml/2006/main"/>
@@ -3016,7 +3016,7 @@
           <p:nvPr/>
         </p:nvPicPr>
         <p:blipFill rotWithShape="1">
-          <a:blip xmlns:r="http://schemas.openxmlformats.org/officeDocument/2006/relationships" xmlns:a="http://schemas.openxmlformats.org/drawingml/2006/main" r:embed="Re95a2541cdf940d8">
+          <a:blip xmlns:r="http://schemas.openxmlformats.org/officeDocument/2006/relationships" xmlns:a="http://schemas.openxmlformats.org/drawingml/2006/main" r:embed="Rea21dd3a0a464140">
             <a:alphaModFix amt="28000"/>
           </a:blip>
           <a:stretch xmlns:a="http://schemas.openxmlformats.org/drawingml/2006/main"/>
@@ -3130,7 +3130,7 @@
           <p:nvPr/>
         </p:nvPicPr>
         <p:blipFill rotWithShape="1">
-          <a:blip xmlns:r="http://schemas.openxmlformats.org/officeDocument/2006/relationships" xmlns:a="http://schemas.openxmlformats.org/drawingml/2006/main" r:embed="Raa7c0b354edf4a5e">
+          <a:blip xmlns:r="http://schemas.openxmlformats.org/officeDocument/2006/relationships" xmlns:a="http://schemas.openxmlformats.org/drawingml/2006/main" r:embed="Rbded4df0ea774a41">
             <a:alphaModFix amt="28000"/>
           </a:blip>
           <a:stretch xmlns:a="http://schemas.openxmlformats.org/drawingml/2006/main"/>
@@ -3457,7 +3457,7 @@
           <p:nvPr/>
         </p:nvPicPr>
         <p:blipFill rotWithShape="1">
-          <a:blip xmlns:r="http://schemas.openxmlformats.org/officeDocument/2006/relationships" xmlns:a="http://schemas.openxmlformats.org/drawingml/2006/main" r:embed="R7c3e9e374db143d7">
+          <a:blip xmlns:r="http://schemas.openxmlformats.org/officeDocument/2006/relationships" xmlns:a="http://schemas.openxmlformats.org/drawingml/2006/main" r:embed="Rfd944c0187fe492b">
             <a:alphaModFix amt="28000"/>
           </a:blip>
           <a:stretch xmlns:a="http://schemas.openxmlformats.org/drawingml/2006/main"/>
@@ -3745,7 +3745,7 @@
           <p:nvPr/>
         </p:nvPicPr>
         <p:blipFill rotWithShape="1">
-          <a:blip xmlns:r="http://schemas.openxmlformats.org/officeDocument/2006/relationships" xmlns:a="http://schemas.openxmlformats.org/drawingml/2006/main" r:embed="Rcac16e9eaba44fff">
+          <a:blip xmlns:r="http://schemas.openxmlformats.org/officeDocument/2006/relationships" xmlns:a="http://schemas.openxmlformats.org/drawingml/2006/main" r:embed="R707225c3b1da454f">
             <a:alphaModFix amt="28000"/>
           </a:blip>
           <a:stretch xmlns:a="http://schemas.openxmlformats.org/drawingml/2006/main"/>
@@ -3982,17 +3982,17 @@
   </p:cSld>
   <p:clrMap bg1="lt1" tx1="dk1" bg2="lt2" tx2="dk2" accent1="accent1" accent2="accent2" accent3="accent3" accent4="accent4" accent5="accent5" accent6="accent6" hlink="hlink" folHlink="folHlink"/>
   <p:sldLayoutIdLst>
-    <p:sldLayoutId xmlns:r="http://schemas.openxmlformats.org/officeDocument/2006/relationships" id="2147483649" r:id="R784a67ccf92d4698"/>
-    <p:sldLayoutId xmlns:r="http://schemas.openxmlformats.org/officeDocument/2006/relationships" id="2147483650" r:id="R5b5b75db171241e9"/>
-    <p:sldLayoutId xmlns:r="http://schemas.openxmlformats.org/officeDocument/2006/relationships" id="2147483651" r:id="R7ca1207844d649ac"/>
-    <p:sldLayoutId xmlns:r="http://schemas.openxmlformats.org/officeDocument/2006/relationships" id="2147483652" r:id="Re029360a24384e78"/>
-    <p:sldLayoutId xmlns:r="http://schemas.openxmlformats.org/officeDocument/2006/relationships" id="2147483653" r:id="Re0133d93da0f44ef"/>
-    <p:sldLayoutId xmlns:r="http://schemas.openxmlformats.org/officeDocument/2006/relationships" id="2147483654" r:id="R0f86667618904be8"/>
-    <p:sldLayoutId xmlns:r="http://schemas.openxmlformats.org/officeDocument/2006/relationships" id="2147483655" r:id="R9d5745bf3dc440e2"/>
-    <p:sldLayoutId xmlns:r="http://schemas.openxmlformats.org/officeDocument/2006/relationships" id="2147483656" r:id="Rbc54e8523ace4b66"/>
-    <p:sldLayoutId xmlns:r="http://schemas.openxmlformats.org/officeDocument/2006/relationships" id="2147483657" r:id="Rf21c2da487174ba0"/>
-    <p:sldLayoutId xmlns:r="http://schemas.openxmlformats.org/officeDocument/2006/relationships" id="2147483658" r:id="R722391f1d94749b4"/>
-    <p:sldLayoutId xmlns:r="http://schemas.openxmlformats.org/officeDocument/2006/relationships" id="2147483659" r:id="Rf44f203fd0344d5a"/>
+    <p:sldLayoutId xmlns:r="http://schemas.openxmlformats.org/officeDocument/2006/relationships" id="2147483649" r:id="Rbdf9a4bf7a644f27"/>
+    <p:sldLayoutId xmlns:r="http://schemas.openxmlformats.org/officeDocument/2006/relationships" id="2147483650" r:id="R9a7f368740cd438f"/>
+    <p:sldLayoutId xmlns:r="http://schemas.openxmlformats.org/officeDocument/2006/relationships" id="2147483651" r:id="R74109791fa7b4305"/>
+    <p:sldLayoutId xmlns:r="http://schemas.openxmlformats.org/officeDocument/2006/relationships" id="2147483652" r:id="R1eb59bfce2d64e7a"/>
+    <p:sldLayoutId xmlns:r="http://schemas.openxmlformats.org/officeDocument/2006/relationships" id="2147483653" r:id="R0fc8bd35836944fa"/>
+    <p:sldLayoutId xmlns:r="http://schemas.openxmlformats.org/officeDocument/2006/relationships" id="2147483654" r:id="R5861737b5a9141dc"/>
+    <p:sldLayoutId xmlns:r="http://schemas.openxmlformats.org/officeDocument/2006/relationships" id="2147483655" r:id="Rb686661c51f1423d"/>
+    <p:sldLayoutId xmlns:r="http://schemas.openxmlformats.org/officeDocument/2006/relationships" id="2147483656" r:id="Rd060ed06107f455c"/>
+    <p:sldLayoutId xmlns:r="http://schemas.openxmlformats.org/officeDocument/2006/relationships" id="2147483657" r:id="R9ee838dfe55d4d93"/>
+    <p:sldLayoutId xmlns:r="http://schemas.openxmlformats.org/officeDocument/2006/relationships" id="2147483658" r:id="R14de3d573dc247b2"/>
+    <p:sldLayoutId xmlns:r="http://schemas.openxmlformats.org/officeDocument/2006/relationships" id="2147483659" r:id="R35c39f2040a14a2b"/>
   </p:sldLayoutIdLst>
   <p:hf hdr="0" ftr="0" dt="0"/>
   <p:txStyles>
@@ -5035,24 +5035,13 @@
             <a:r>
               <a:rPr sz="2400">
                 <a:solidFill>
-                  <a:srgbClr val="080808"/>
-                </a:solidFill>
-                <a:latin typeface="JetBrains Mono"/>
-                <a:ea typeface="JetBrains Mono"/>
-                <a:cs typeface="JetBrains Mono"/>
-              </a:rPr>
-              <a:t>    </a:t>
-            </a:r>
-            <a:r>
-              <a:rPr sz="2400">
-                <a:solidFill>
                   <a:srgbClr val="1750EB"/>
                 </a:solidFill>
                 <a:latin typeface="JetBrains Mono"/>
                 <a:ea typeface="JetBrains Mono"/>
                 <a:cs typeface="JetBrains Mono"/>
               </a:rPr>
-              <a:t>print</a:t>
+              <a:t>    print</a:t>
             </a:r>
             <a:r>
               <a:rPr sz="2400">
@@ -5150,24 +5139,13 @@
             <a:r>
               <a:rPr sz="2400">
                 <a:solidFill>
-                  <a:srgbClr val="080808"/>
-                </a:solidFill>
-                <a:latin typeface="JetBrains Mono"/>
-                <a:ea typeface="JetBrains Mono"/>
-                <a:cs typeface="JetBrains Mono"/>
-              </a:rPr>
-              <a:t>    </a:t>
-            </a:r>
-            <a:r>
-              <a:rPr sz="2400">
-                <a:solidFill>
                   <a:srgbClr val="1750EB"/>
                 </a:solidFill>
                 <a:latin typeface="JetBrains Mono"/>
                 <a:ea typeface="JetBrains Mono"/>
                 <a:cs typeface="JetBrains Mono"/>
               </a:rPr>
-              <a:t>print</a:t>
+              <a:t>    print</a:t>
             </a:r>
             <a:r>
               <a:rPr sz="2400">
@@ -5243,24 +5221,13 @@
             <a:r>
               <a:rPr sz="2400">
                 <a:solidFill>
-                  <a:srgbClr val="080808"/>
-                </a:solidFill>
-                <a:latin typeface="JetBrains Mono"/>
-                <a:ea typeface="JetBrains Mono"/>
-                <a:cs typeface="JetBrains Mono"/>
-              </a:rPr>
-              <a:t>    </a:t>
-            </a:r>
-            <a:r>
-              <a:rPr sz="2400">
-                <a:solidFill>
                   <a:srgbClr val="1750EB"/>
                 </a:solidFill>
                 <a:latin typeface="JetBrains Mono"/>
                 <a:ea typeface="JetBrains Mono"/>
                 <a:cs typeface="JetBrains Mono"/>
               </a:rPr>
-              <a:t>print</a:t>
+              <a:t>    print</a:t>
             </a:r>
             <a:r>
               <a:rPr sz="2400">
@@ -5720,24 +5687,13 @@
             <a:r>
               <a:rPr sz="2400">
                 <a:solidFill>
-                  <a:srgbClr val="080808"/>
-                </a:solidFill>
-                <a:latin typeface="JetBrains Mono"/>
-                <a:ea typeface="JetBrains Mono"/>
-                <a:cs typeface="JetBrains Mono"/>
-              </a:rPr>
-              <a:t>    </a:t>
-            </a:r>
-            <a:r>
-              <a:rPr sz="2400">
-                <a:solidFill>
                   <a:srgbClr val="1750EB"/>
                 </a:solidFill>
                 <a:latin typeface="JetBrains Mono"/>
                 <a:ea typeface="JetBrains Mono"/>
                 <a:cs typeface="JetBrains Mono"/>
               </a:rPr>
-              <a:t>print</a:t>
+              <a:t>    print</a:t>
             </a:r>
             <a:r>
               <a:rPr sz="2400">
@@ -5835,24 +5791,13 @@
             <a:r>
               <a:rPr sz="2400">
                 <a:solidFill>
-                  <a:srgbClr val="080808"/>
-                </a:solidFill>
-                <a:latin typeface="JetBrains Mono"/>
-                <a:ea typeface="JetBrains Mono"/>
-                <a:cs typeface="JetBrains Mono"/>
-              </a:rPr>
-              <a:t>    </a:t>
-            </a:r>
-            <a:r>
-              <a:rPr sz="2400">
-                <a:solidFill>
                   <a:srgbClr val="1750EB"/>
                 </a:solidFill>
                 <a:latin typeface="JetBrains Mono"/>
                 <a:ea typeface="JetBrains Mono"/>
                 <a:cs typeface="JetBrains Mono"/>
               </a:rPr>
-              <a:t>print</a:t>
+              <a:t>    print</a:t>
             </a:r>
             <a:r>
               <a:rPr sz="2400">
@@ -5928,24 +5873,13 @@
             <a:r>
               <a:rPr sz="2400">
                 <a:solidFill>
-                  <a:srgbClr val="080808"/>
-                </a:solidFill>
-                <a:latin typeface="JetBrains Mono"/>
-                <a:ea typeface="JetBrains Mono"/>
-                <a:cs typeface="JetBrains Mono"/>
-              </a:rPr>
-              <a:t>    </a:t>
-            </a:r>
-            <a:r>
-              <a:rPr sz="2400">
-                <a:solidFill>
                   <a:srgbClr val="1750EB"/>
                 </a:solidFill>
                 <a:latin typeface="JetBrains Mono"/>
                 <a:ea typeface="JetBrains Mono"/>
                 <a:cs typeface="JetBrains Mono"/>
               </a:rPr>
-              <a:t>print</a:t>
+              <a:t>    print</a:t>
             </a:r>
             <a:r>
               <a:rPr sz="2400">
@@ -6405,24 +6339,13 @@
             <a:r>
               <a:rPr sz="2400">
                 <a:solidFill>
-                  <a:srgbClr val="080808"/>
-                </a:solidFill>
-                <a:latin typeface="JetBrains Mono"/>
-                <a:ea typeface="JetBrains Mono"/>
-                <a:cs typeface="JetBrains Mono"/>
-              </a:rPr>
-              <a:t>    </a:t>
-            </a:r>
-            <a:r>
-              <a:rPr sz="2400">
-                <a:solidFill>
                   <a:srgbClr val="1750EB"/>
                 </a:solidFill>
                 <a:latin typeface="JetBrains Mono"/>
                 <a:ea typeface="JetBrains Mono"/>
                 <a:cs typeface="JetBrains Mono"/>
               </a:rPr>
-              <a:t>print</a:t>
+              <a:t>    print</a:t>
             </a:r>
             <a:r>
               <a:rPr sz="2400">
@@ -6520,24 +6443,13 @@
             <a:r>
               <a:rPr sz="2400">
                 <a:solidFill>
-                  <a:srgbClr val="080808"/>
-                </a:solidFill>
-                <a:latin typeface="JetBrains Mono"/>
-                <a:ea typeface="JetBrains Mono"/>
-                <a:cs typeface="JetBrains Mono"/>
-              </a:rPr>
-              <a:t>    </a:t>
-            </a:r>
-            <a:r>
-              <a:rPr sz="2400">
-                <a:solidFill>
                   <a:srgbClr val="1750EB"/>
                 </a:solidFill>
                 <a:latin typeface="JetBrains Mono"/>
                 <a:ea typeface="JetBrains Mono"/>
                 <a:cs typeface="JetBrains Mono"/>
               </a:rPr>
-              <a:t>print</a:t>
+              <a:t>    print</a:t>
             </a:r>
             <a:r>
               <a:rPr sz="2400">
@@ -6613,24 +6525,13 @@
             <a:r>
               <a:rPr sz="2400">
                 <a:solidFill>
-                  <a:srgbClr val="080808"/>
-                </a:solidFill>
-                <a:latin typeface="JetBrains Mono"/>
-                <a:ea typeface="JetBrains Mono"/>
-                <a:cs typeface="JetBrains Mono"/>
-              </a:rPr>
-              <a:t>    </a:t>
-            </a:r>
-            <a:r>
-              <a:rPr sz="2400">
-                <a:solidFill>
                   <a:srgbClr val="1750EB"/>
                 </a:solidFill>
                 <a:latin typeface="JetBrains Mono"/>
                 <a:ea typeface="JetBrains Mono"/>
                 <a:cs typeface="JetBrains Mono"/>
               </a:rPr>
-              <a:t>print</a:t>
+              <a:t>    print</a:t>
             </a:r>
             <a:r>
               <a:rPr sz="2400">
@@ -7345,24 +7246,13 @@
             <a:r>
               <a:rPr sz="1400">
                 <a:solidFill>
-                  <a:srgbClr val="080808"/>
-                </a:solidFill>
-                <a:latin typeface="JetBrains Mono"/>
-                <a:ea typeface="JetBrains Mono"/>
-                <a:cs typeface="JetBrains Mono"/>
-              </a:rPr>
-              <a:t>    </a:t>
-            </a:r>
-            <a:r>
-              <a:rPr sz="1400">
-                <a:solidFill>
                   <a:srgbClr val="1750EB"/>
                 </a:solidFill>
                 <a:latin typeface="JetBrains Mono"/>
                 <a:ea typeface="JetBrains Mono"/>
                 <a:cs typeface="JetBrains Mono"/>
               </a:rPr>
-              <a:t>print</a:t>
+              <a:t>    print</a:t>
             </a:r>
             <a:r>
               <a:rPr sz="1400">
@@ -7464,24 +7354,13 @@
             <a:r>
               <a:rPr sz="1400">
                 <a:solidFill>
-                  <a:srgbClr val="080808"/>
-                </a:solidFill>
-                <a:latin typeface="JetBrains Mono"/>
-                <a:ea typeface="JetBrains Mono"/>
-                <a:cs typeface="JetBrains Mono"/>
-              </a:rPr>
-              <a:t>    </a:t>
-            </a:r>
-            <a:r>
-              <a:rPr sz="1400">
-                <a:solidFill>
                   <a:srgbClr val="1750EB"/>
                 </a:solidFill>
                 <a:latin typeface="JetBrains Mono"/>
                 <a:ea typeface="JetBrains Mono"/>
                 <a:cs typeface="JetBrains Mono"/>
               </a:rPr>
-              <a:t>print</a:t>
+              <a:t>    print</a:t>
             </a:r>
             <a:r>
               <a:rPr sz="1400">
@@ -7561,24 +7440,13 @@
             <a:r>
               <a:rPr sz="1400">
                 <a:solidFill>
-                  <a:srgbClr val="080808"/>
-                </a:solidFill>
-                <a:latin typeface="JetBrains Mono"/>
-                <a:ea typeface="JetBrains Mono"/>
-                <a:cs typeface="JetBrains Mono"/>
-              </a:rPr>
-              <a:t>    </a:t>
-            </a:r>
-            <a:r>
-              <a:rPr sz="1400">
-                <a:solidFill>
                   <a:srgbClr val="1750EB"/>
                 </a:solidFill>
                 <a:latin typeface="JetBrains Mono"/>
                 <a:ea typeface="JetBrains Mono"/>
                 <a:cs typeface="JetBrains Mono"/>
               </a:rPr>
-              <a:t>print</a:t>
+              <a:t>    print</a:t>
             </a:r>
             <a:r>
               <a:rPr sz="1400">
@@ -8176,24 +8044,13 @@
             <a:r>
               <a:rPr sz="1400">
                 <a:solidFill>
-                  <a:srgbClr val="080808"/>
-                </a:solidFill>
-                <a:latin typeface="JetBrains Mono"/>
-                <a:ea typeface="JetBrains Mono"/>
-                <a:cs typeface="JetBrains Mono"/>
-              </a:rPr>
-              <a:t>    </a:t>
-            </a:r>
-            <a:r>
-              <a:rPr sz="1400">
-                <a:solidFill>
                   <a:srgbClr val="1750EB"/>
                 </a:solidFill>
                 <a:latin typeface="JetBrains Mono"/>
                 <a:ea typeface="JetBrains Mono"/>
                 <a:cs typeface="JetBrains Mono"/>
               </a:rPr>
-              <a:t>print</a:t>
+              <a:t>    print</a:t>
             </a:r>
             <a:r>
               <a:rPr sz="1400">
@@ -8295,24 +8152,13 @@
             <a:r>
               <a:rPr sz="1400">
                 <a:solidFill>
-                  <a:srgbClr val="080808"/>
-                </a:solidFill>
-                <a:latin typeface="JetBrains Mono"/>
-                <a:ea typeface="JetBrains Mono"/>
-                <a:cs typeface="JetBrains Mono"/>
-              </a:rPr>
-              <a:t>    </a:t>
-            </a:r>
-            <a:r>
-              <a:rPr sz="1400">
-                <a:solidFill>
                   <a:srgbClr val="1750EB"/>
                 </a:solidFill>
                 <a:latin typeface="JetBrains Mono"/>
                 <a:ea typeface="JetBrains Mono"/>
                 <a:cs typeface="JetBrains Mono"/>
               </a:rPr>
-              <a:t>print</a:t>
+              <a:t>    print</a:t>
             </a:r>
             <a:r>
               <a:rPr sz="1400">
@@ -8392,24 +8238,13 @@
             <a:r>
               <a:rPr sz="1400">
                 <a:solidFill>
-                  <a:srgbClr val="080808"/>
-                </a:solidFill>
-                <a:latin typeface="JetBrains Mono"/>
-                <a:ea typeface="JetBrains Mono"/>
-                <a:cs typeface="JetBrains Mono"/>
-              </a:rPr>
-              <a:t>    </a:t>
-            </a:r>
-            <a:r>
-              <a:rPr sz="1400">
-                <a:solidFill>
                   <a:srgbClr val="1750EB"/>
                 </a:solidFill>
                 <a:latin typeface="JetBrains Mono"/>
                 <a:ea typeface="JetBrains Mono"/>
                 <a:cs typeface="JetBrains Mono"/>
               </a:rPr>
-              <a:t>print</a:t>
+              <a:t>    print</a:t>
             </a:r>
             <a:r>
               <a:rPr sz="1400">
@@ -9095,24 +8930,13 @@
             <a:r>
               <a:rPr sz="1400">
                 <a:solidFill>
-                  <a:srgbClr val="080808"/>
-                </a:solidFill>
-                <a:latin typeface="JetBrains Mono"/>
-                <a:ea typeface="JetBrains Mono"/>
-                <a:cs typeface="JetBrains Mono"/>
-              </a:rPr>
-              <a:t>    </a:t>
-            </a:r>
-            <a:r>
-              <a:rPr sz="1400">
-                <a:solidFill>
                   <a:srgbClr val="1750EB"/>
                 </a:solidFill>
                 <a:latin typeface="JetBrains Mono"/>
                 <a:ea typeface="JetBrains Mono"/>
                 <a:cs typeface="JetBrains Mono"/>
               </a:rPr>
-              <a:t>print</a:t>
+              <a:t>    print</a:t>
             </a:r>
             <a:r>
               <a:rPr sz="1400">
@@ -9214,24 +9038,13 @@
             <a:r>
               <a:rPr sz="1400">
                 <a:solidFill>
-                  <a:srgbClr val="080808"/>
-                </a:solidFill>
-                <a:latin typeface="JetBrains Mono"/>
-                <a:ea typeface="JetBrains Mono"/>
-                <a:cs typeface="JetBrains Mono"/>
-              </a:rPr>
-              <a:t>    </a:t>
-            </a:r>
-            <a:r>
-              <a:rPr sz="1400">
-                <a:solidFill>
                   <a:srgbClr val="1750EB"/>
                 </a:solidFill>
                 <a:latin typeface="JetBrains Mono"/>
                 <a:ea typeface="JetBrains Mono"/>
                 <a:cs typeface="JetBrains Mono"/>
               </a:rPr>
-              <a:t>print</a:t>
+              <a:t>    print</a:t>
             </a:r>
             <a:r>
               <a:rPr sz="1400">
@@ -9311,24 +9124,13 @@
             <a:r>
               <a:rPr sz="1400">
                 <a:solidFill>
-                  <a:srgbClr val="080808"/>
-                </a:solidFill>
-                <a:latin typeface="JetBrains Mono"/>
-                <a:ea typeface="JetBrains Mono"/>
-                <a:cs typeface="JetBrains Mono"/>
-              </a:rPr>
-              <a:t>    </a:t>
-            </a:r>
-            <a:r>
-              <a:rPr sz="1400">
-                <a:solidFill>
                   <a:srgbClr val="1750EB"/>
                 </a:solidFill>
                 <a:latin typeface="JetBrains Mono"/>
                 <a:ea typeface="JetBrains Mono"/>
                 <a:cs typeface="JetBrains Mono"/>
               </a:rPr>
-              <a:t>print</a:t>
+              <a:t>    print</a:t>
             </a:r>
             <a:r>
               <a:rPr sz="1400">
@@ -10036,24 +9838,13 @@
             <a:r>
               <a:rPr sz="1400">
                 <a:solidFill>
-                  <a:srgbClr val="080808"/>
-                </a:solidFill>
-                <a:latin typeface="JetBrains Mono"/>
-                <a:ea typeface="JetBrains Mono"/>
-                <a:cs typeface="JetBrains Mono"/>
-              </a:rPr>
-              <a:t>    </a:t>
-            </a:r>
-            <a:r>
-              <a:rPr sz="1400">
-                <a:solidFill>
                   <a:srgbClr val="1750EB"/>
                 </a:solidFill>
                 <a:latin typeface="JetBrains Mono"/>
                 <a:ea typeface="JetBrains Mono"/>
                 <a:cs typeface="JetBrains Mono"/>
               </a:rPr>
-              <a:t>print</a:t>
+              <a:t>    print</a:t>
             </a:r>
             <a:r>
               <a:rPr sz="1400">
@@ -10155,24 +9946,13 @@
             <a:r>
               <a:rPr sz="1400">
                 <a:solidFill>
-                  <a:srgbClr val="080808"/>
-                </a:solidFill>
-                <a:latin typeface="JetBrains Mono"/>
-                <a:ea typeface="JetBrains Mono"/>
-                <a:cs typeface="JetBrains Mono"/>
-              </a:rPr>
-              <a:t>    </a:t>
-            </a:r>
-            <a:r>
-              <a:rPr sz="1400">
-                <a:solidFill>
                   <a:srgbClr val="1750EB"/>
                 </a:solidFill>
                 <a:latin typeface="JetBrains Mono"/>
                 <a:ea typeface="JetBrains Mono"/>
                 <a:cs typeface="JetBrains Mono"/>
               </a:rPr>
-              <a:t>print</a:t>
+              <a:t>    print</a:t>
             </a:r>
             <a:r>
               <a:rPr sz="1400">
@@ -10252,24 +10032,13 @@
             <a:r>
               <a:rPr sz="1400">
                 <a:solidFill>
-                  <a:srgbClr val="080808"/>
-                </a:solidFill>
-                <a:latin typeface="JetBrains Mono"/>
-                <a:ea typeface="JetBrains Mono"/>
-                <a:cs typeface="JetBrains Mono"/>
-              </a:rPr>
-              <a:t>    </a:t>
-            </a:r>
-            <a:r>
-              <a:rPr sz="1400">
-                <a:solidFill>
                   <a:srgbClr val="1750EB"/>
                 </a:solidFill>
                 <a:latin typeface="JetBrains Mono"/>
                 <a:ea typeface="JetBrains Mono"/>
                 <a:cs typeface="JetBrains Mono"/>
               </a:rPr>
-              <a:t>print</a:t>
+              <a:t>    print</a:t>
             </a:r>
             <a:r>
               <a:rPr sz="1400">
@@ -10577,24 +10346,13 @@
             <a:r>
               <a:rPr sz="1800">
                 <a:solidFill>
-                  <a:srgbClr val="080808"/>
-                </a:solidFill>
-                <a:latin typeface="JetBrains Mono"/>
-                <a:ea typeface="JetBrains Mono"/>
-                <a:cs typeface="JetBrains Mono"/>
-              </a:rPr>
-              <a:t>    </a:t>
-            </a:r>
-            <a:r>
-              <a:rPr sz="1800">
-                <a:solidFill>
                   <a:srgbClr val="1750EB"/>
                 </a:solidFill>
                 <a:latin typeface="JetBrains Mono"/>
                 <a:ea typeface="JetBrains Mono"/>
                 <a:cs typeface="JetBrains Mono"/>
               </a:rPr>
-              <a:t>print</a:t>
+              <a:t>    print</a:t>
             </a:r>
             <a:r>
               <a:rPr sz="1800">
@@ -10692,24 +10450,13 @@
             <a:r>
               <a:rPr sz="1800">
                 <a:solidFill>
-                  <a:srgbClr val="080808"/>
-                </a:solidFill>
-                <a:latin typeface="JetBrains Mono"/>
-                <a:ea typeface="JetBrains Mono"/>
-                <a:cs typeface="JetBrains Mono"/>
-              </a:rPr>
-              <a:t>    </a:t>
-            </a:r>
-            <a:r>
-              <a:rPr sz="1800">
-                <a:solidFill>
                   <a:srgbClr val="1750EB"/>
                 </a:solidFill>
                 <a:latin typeface="JetBrains Mono"/>
                 <a:ea typeface="JetBrains Mono"/>
                 <a:cs typeface="JetBrains Mono"/>
               </a:rPr>
-              <a:t>print</a:t>
+              <a:t>    print</a:t>
             </a:r>
             <a:r>
               <a:rPr sz="1800">
@@ -10785,24 +10532,13 @@
             <a:r>
               <a:rPr sz="1800">
                 <a:solidFill>
-                  <a:srgbClr val="080808"/>
-                </a:solidFill>
-                <a:latin typeface="JetBrains Mono"/>
-                <a:ea typeface="JetBrains Mono"/>
-                <a:cs typeface="JetBrains Mono"/>
-              </a:rPr>
-              <a:t>    </a:t>
-            </a:r>
-            <a:r>
-              <a:rPr sz="1800">
-                <a:solidFill>
                   <a:srgbClr val="1750EB"/>
                 </a:solidFill>
                 <a:latin typeface="JetBrains Mono"/>
                 <a:ea typeface="JetBrains Mono"/>
                 <a:cs typeface="JetBrains Mono"/>
               </a:rPr>
-              <a:t>print</a:t>
+              <a:t>    print</a:t>
             </a:r>
             <a:r>
               <a:rPr sz="1800">
